--- a/system-design-101/vi/lessons/sd-13-008/slides/sd-13-008.pptx
+++ b/system-design-101/vi/lessons/sd-13-008/slides/sd-13-008.pptx
@@ -2555,7 +2555,18 @@
                 <a:ea typeface="Be Vietnam Pro" pitchFamily="34" charset="-122"/>
                 <a:cs typeface="Be Vietnam Pro" pitchFamily="34" charset="-120"/>
               </a:rPr>
-              <a:t> sánh 2–3</a:t>
+              <a:t> sánh</a:t>
+            </a:r>
+            <a:r>
+              <a:rPr lang="en-US" sz="2550" b="1" dirty="0" spc="-13" kern="0">
+                <a:solidFill>
+                  <a:srgbClr val="F3EEE3"/>
+                </a:solidFill>
+                <a:latin typeface="Be Vietnam Pro" pitchFamily="34" charset="0"/>
+                <a:ea typeface="Be Vietnam Pro" pitchFamily="34" charset="-122"/>
+                <a:cs typeface="Be Vietnam Pro" pitchFamily="34" charset="-120"/>
+              </a:rPr>
+              <a:t> vài</a:t>
             </a:r>
             <a:r>
               <a:rPr lang="en-US" sz="2550" b="1" dirty="0" spc="29" kern="0">
@@ -2569,7 +2580,7 @@
               <a:t> ứng</a:t>
             </a:r>
             <a:r>
-              <a:rPr lang="en-US" sz="2550" b="1" dirty="0" spc="-2" kern="0">
+              <a:rPr lang="en-US" sz="2550" b="1" dirty="0" spc="-1" kern="0">
                 <a:solidFill>
                   <a:srgbClr val="F3EEE3"/>
                 </a:solidFill>
@@ -5385,6 +5396,50 @@
               <a:buNone/>
             </a:pPr>
             <a:r>
+              <a:rPr lang="en-US" sz="2550" dirty="0" spc="4" kern="0">
+                <a:solidFill>
+                  <a:srgbClr val="E4E1D8"/>
+                </a:solidFill>
+                <a:latin typeface="Be Vietnam Pro" pitchFamily="34" charset="0"/>
+                <a:ea typeface="Be Vietnam Pro" pitchFamily="34" charset="-122"/>
+                <a:cs typeface="Be Vietnam Pro" pitchFamily="34" charset="-120"/>
+              </a:rPr>
+              <a:t>Nêu</a:t>
+            </a:r>
+            <a:r>
+              <a:rPr lang="en-US" sz="2550" dirty="0" spc="-34" kern="0">
+                <a:solidFill>
+                  <a:srgbClr val="E4E1D8"/>
+                </a:solidFill>
+                <a:latin typeface="Be Vietnam Pro" pitchFamily="34" charset="0"/>
+                <a:ea typeface="Be Vietnam Pro" pitchFamily="34" charset="-122"/>
+                <a:cs typeface="Be Vietnam Pro" pitchFamily="34" charset="-120"/>
+              </a:rPr>
+              <a:t> rõ</a:t>
+            </a:r>
+            <a:r>
+              <a:rPr lang="en-US" sz="2550" dirty="0" spc="-4" kern="0">
+                <a:solidFill>
+                  <a:srgbClr val="E4E1D8"/>
+                </a:solidFill>
+                <a:latin typeface="Be Vietnam Pro" pitchFamily="34" charset="0"/>
+                <a:ea typeface="Be Vietnam Pro" pitchFamily="34" charset="-122"/>
+                <a:cs typeface="Be Vietnam Pro" pitchFamily="34" charset="-120"/>
+              </a:rPr>
+              <a:t> việc</a:t>
+            </a:r>
+            <a:r>
+              <a:rPr lang="en-US" sz="2550" dirty="0" spc="1" kern="0">
+                <a:solidFill>
+                  <a:srgbClr val="E4E1D8"/>
+                </a:solidFill>
+                <a:latin typeface="Be Vietnam Pro" pitchFamily="34" charset="0"/>
+                <a:ea typeface="Be Vietnam Pro" pitchFamily="34" charset="-122"/>
+                <a:cs typeface="Be Vietnam Pro" pitchFamily="34" charset="-120"/>
+              </a:rPr>
+              <a:t> cần</a:t>
+            </a:r>
+            <a:r>
               <a:rPr lang="en-US" sz="2550" dirty="0" spc="0" kern="0">
                 <a:solidFill>
                   <a:srgbClr val="E4E1D8"/>
@@ -5393,10 +5448,10 @@
                 <a:ea typeface="Be Vietnam Pro" pitchFamily="34" charset="-122"/>
                 <a:cs typeface="Be Vietnam Pro" pitchFamily="34" charset="-120"/>
               </a:rPr>
-              <a:t>Mạng,</a:t>
-            </a:r>
-            <a:r>
-              <a:rPr lang="en-US" sz="2550" dirty="0" spc="-3" kern="0">
+              <a:t> giải</a:t>
+            </a:r>
+            <a:r>
+              <a:rPr lang="en-US" sz="2550" dirty="0" spc="-14" kern="0">
                 <a:solidFill>
                   <a:srgbClr val="E4E1D8"/>
                 </a:solidFill>
@@ -5404,40 +5459,7 @@
                 <a:ea typeface="Be Vietnam Pro" pitchFamily="34" charset="-122"/>
                 <a:cs typeface="Be Vietnam Pro" pitchFamily="34" charset="-120"/>
               </a:rPr>
-              <a:t> bảo</a:t>
-            </a:r>
-            <a:r>
-              <a:rPr lang="en-US" sz="2550" dirty="0" spc="-9" kern="0">
-                <a:solidFill>
-                  <a:srgbClr val="E4E1D8"/>
-                </a:solidFill>
-                <a:latin typeface="Be Vietnam Pro" pitchFamily="34" charset="0"/>
-                <a:ea typeface="Be Vietnam Pro" pitchFamily="34" charset="-122"/>
-                <a:cs typeface="Be Vietnam Pro" pitchFamily="34" charset="-120"/>
-              </a:rPr>
-              <a:t> mật,</a:t>
-            </a:r>
-            <a:r>
-              <a:rPr lang="en-US" sz="2550" dirty="0" spc="1" kern="0">
-                <a:solidFill>
-                  <a:srgbClr val="E4E1D8"/>
-                </a:solidFill>
-                <a:latin typeface="Be Vietnam Pro" pitchFamily="34" charset="0"/>
-                <a:ea typeface="Be Vietnam Pro" pitchFamily="34" charset="-122"/>
-                <a:cs typeface="Be Vietnam Pro" pitchFamily="34" charset="-120"/>
-              </a:rPr>
-              <a:t> quan</a:t>
-            </a:r>
-            <a:r>
-              <a:rPr lang="en-US" sz="2550" dirty="0" spc="-24" kern="0">
-                <a:solidFill>
-                  <a:srgbClr val="E4E1D8"/>
-                </a:solidFill>
-                <a:latin typeface="Be Vietnam Pro" pitchFamily="34" charset="0"/>
-                <a:ea typeface="Be Vietnam Pro" pitchFamily="34" charset="-122"/>
-                <a:cs typeface="Be Vietnam Pro" pitchFamily="34" charset="-120"/>
-              </a:rPr>
-              <a:t> sát...</a:t>
+              <a:t> quyết.</a:t>
             </a:r>
             <a:endParaRPr lang="en-US" sz="2550" dirty="0"/>
           </a:p>
@@ -5618,7 +5640,7 @@
               <a:buNone/>
             </a:pPr>
             <a:r>
-              <a:rPr lang="en-US" sz="2700" b="1" dirty="0" spc="4" kern="0">
+              <a:rPr lang="en-US" sz="2700" b="1" dirty="0" spc="-24" kern="0">
                 <a:solidFill>
                   <a:srgbClr val="F3EEE3"/>
                 </a:solidFill>
@@ -5626,10 +5648,10 @@
                 <a:ea typeface="Be Vietnam Pro" pitchFamily="34" charset="-122"/>
                 <a:cs typeface="Be Vietnam Pro" pitchFamily="34" charset="-120"/>
               </a:rPr>
-              <a:t>Quan</a:t>
-            </a:r>
-            <a:r>
-              <a:rPr lang="en-US" sz="2700" b="1" dirty="0" spc="-9" kern="0">
+              <a:t>Lớp</a:t>
+            </a:r>
+            <a:r>
+              <a:rPr lang="en-US" sz="2700" b="1" dirty="0" spc="-2" kern="0">
                 <a:solidFill>
                   <a:srgbClr val="F3EEE3"/>
                 </a:solidFill>
@@ -5637,7 +5659,18 @@
                 <a:ea typeface="Be Vietnam Pro" pitchFamily="34" charset="-122"/>
                 <a:cs typeface="Be Vietnam Pro" pitchFamily="34" charset="-120"/>
               </a:rPr>
-              <a:t> sát</a:t>
+              <a:t> việc</a:t>
+            </a:r>
+            <a:r>
+              <a:rPr lang="en-US" sz="2700" b="1" dirty="0" spc="-1" kern="0">
+                <a:solidFill>
+                  <a:srgbClr val="F3EEE3"/>
+                </a:solidFill>
+                <a:latin typeface="Be Vietnam Pro" pitchFamily="34" charset="0"/>
+                <a:ea typeface="Be Vietnam Pro" pitchFamily="34" charset="-122"/>
+                <a:cs typeface="Be Vietnam Pro" pitchFamily="34" charset="-120"/>
+              </a:rPr>
+              <a:t> A</a:t>
             </a:r>
             <a:endParaRPr lang="en-US" sz="2700" dirty="0"/>
           </a:p>
@@ -5677,7 +5710,7 @@
               <a:buNone/>
             </a:pPr>
             <a:r>
-              <a:rPr lang="en-US" sz="2700" b="1" dirty="0" spc="7" kern="0">
+              <a:rPr lang="en-US" sz="2700" b="1" dirty="0" spc="-24" kern="0">
                 <a:solidFill>
                   <a:srgbClr val="F3EEE3"/>
                 </a:solidFill>
@@ -5685,10 +5718,10 @@
                 <a:ea typeface="Be Vietnam Pro" pitchFamily="34" charset="-122"/>
                 <a:cs typeface="Be Vietnam Pro" pitchFamily="34" charset="-120"/>
               </a:rPr>
-              <a:t>Bảo</a:t>
-            </a:r>
-            <a:r>
-              <a:rPr lang="en-US" sz="2700" b="1" dirty="0" spc="-12" kern="0">
+              <a:t>Lớp</a:t>
+            </a:r>
+            <a:r>
+              <a:rPr lang="en-US" sz="2700" b="1" dirty="0" spc="-2" kern="0">
                 <a:solidFill>
                   <a:srgbClr val="F3EEE3"/>
                 </a:solidFill>
@@ -5696,7 +5729,18 @@
                 <a:ea typeface="Be Vietnam Pro" pitchFamily="34" charset="-122"/>
                 <a:cs typeface="Be Vietnam Pro" pitchFamily="34" charset="-120"/>
               </a:rPr>
-              <a:t> mật</a:t>
+              <a:t> việc</a:t>
+            </a:r>
+            <a:r>
+              <a:rPr lang="en-US" sz="2700" b="1" dirty="0" spc="-1" kern="0">
+                <a:solidFill>
+                  <a:srgbClr val="F3EEE3"/>
+                </a:solidFill>
+                <a:latin typeface="Be Vietnam Pro" pitchFamily="34" charset="0"/>
+                <a:ea typeface="Be Vietnam Pro" pitchFamily="34" charset="-122"/>
+                <a:cs typeface="Be Vietnam Pro" pitchFamily="34" charset="-120"/>
+              </a:rPr>
+              <a:t> B</a:t>
             </a:r>
             <a:endParaRPr lang="en-US" sz="2700" dirty="0"/>
           </a:p>
@@ -5736,7 +5780,7 @@
               <a:buNone/>
             </a:pPr>
             <a:r>
-              <a:rPr lang="en-US" sz="2700" b="1" dirty="0" spc="-4" kern="0">
+              <a:rPr lang="en-US" sz="2700" b="1" dirty="0" spc="-24" kern="0">
                 <a:solidFill>
                   <a:srgbClr val="F3EEE3"/>
                 </a:solidFill>
@@ -5744,7 +5788,29 @@
                 <a:ea typeface="Be Vietnam Pro" pitchFamily="34" charset="-122"/>
                 <a:cs typeface="Be Vietnam Pro" pitchFamily="34" charset="-120"/>
               </a:rPr>
-              <a:t>Mạng</a:t>
+              <a:t>Lớp</a:t>
+            </a:r>
+            <a:r>
+              <a:rPr lang="en-US" sz="2700" b="1" dirty="0" spc="-2" kern="0">
+                <a:solidFill>
+                  <a:srgbClr val="F3EEE3"/>
+                </a:solidFill>
+                <a:latin typeface="Be Vietnam Pro" pitchFamily="34" charset="0"/>
+                <a:ea typeface="Be Vietnam Pro" pitchFamily="34" charset="-122"/>
+                <a:cs typeface="Be Vietnam Pro" pitchFamily="34" charset="-120"/>
+              </a:rPr>
+              <a:t> việc</a:t>
+            </a:r>
+            <a:r>
+              <a:rPr lang="en-US" sz="2700" b="1" dirty="0" spc="1" kern="0">
+                <a:solidFill>
+                  <a:srgbClr val="F3EEE3"/>
+                </a:solidFill>
+                <a:latin typeface="Be Vietnam Pro" pitchFamily="34" charset="0"/>
+                <a:ea typeface="Be Vietnam Pro" pitchFamily="34" charset="-122"/>
+                <a:cs typeface="Be Vietnam Pro" pitchFamily="34" charset="-120"/>
+              </a:rPr>
+              <a:t> C</a:t>
             </a:r>
             <a:endParaRPr lang="en-US" sz="2700" dirty="0"/>
           </a:p>
@@ -6453,7 +6519,7 @@
               <a:t>So sánh</a:t>
             </a:r>
             <a:r>
-              <a:rPr lang="en-US" sz="7200" dirty="0" spc="-62" kern="0">
+              <a:rPr lang="en-US" sz="7200" dirty="0" spc="-58" kern="0">
                 <a:solidFill>
                   <a:srgbClr val="14161C"/>
                 </a:solidFill>
@@ -6461,7 +6527,7 @@
                 <a:ea typeface="Bricolage Grotesque ExtraBold" pitchFamily="34" charset="-122"/>
                 <a:cs typeface="Bricolage Grotesque ExtraBold" pitchFamily="34" charset="-120"/>
               </a:rPr>
-              <a:t> 2–3</a:t>
+              <a:t> vài</a:t>
             </a:r>
             <a:r>
               <a:rPr lang="en-US" sz="7200" dirty="0" spc="11" kern="0">
@@ -6726,7 +6792,7 @@
                         <a:buNone/>
                       </a:pPr>
                       <a:r>
-                        <a:rPr lang="en-US" sz="2550" b="1" dirty="0" spc="-3" kern="0">
+                        <a:rPr lang="en-US" sz="2550" b="1" dirty="0" spc="-50" kern="0">
                           <a:solidFill>
                             <a:srgbClr val="14161C"/>
                           </a:solidFill>
@@ -6734,18 +6800,7 @@
                           <a:ea typeface="Be Vietnam Pro" pitchFamily="34" charset="-122"/>
                           <a:cs typeface="Be Vietnam Pro" pitchFamily="34" charset="-120"/>
                         </a:rPr>
-                        <a:t>Ứng</a:t>
-                      </a:r>
-                      <a:r>
-                        <a:rPr lang="en-US" sz="2550" b="1" dirty="0" spc="-1" kern="0">
-                          <a:solidFill>
-                            <a:srgbClr val="14161C"/>
-                          </a:solidFill>
-                          <a:latin typeface="Be Vietnam Pro" pitchFamily="34" charset="0"/>
-                          <a:ea typeface="Be Vietnam Pro" pitchFamily="34" charset="-122"/>
-                          <a:cs typeface="Be Vietnam Pro" pitchFamily="34" charset="-120"/>
-                        </a:rPr>
-                        <a:t> viên C</a:t>
+                        <a:t>...</a:t>
                       </a:r>
                       <a:endParaRPr lang="en-US" sz="1200" dirty="0"/>
                     </a:p>
@@ -6788,7 +6843,7 @@
                         <a:buNone/>
                       </a:pPr>
                       <a:r>
-                        <a:rPr lang="en-US" sz="2550" dirty="0" spc="-2" kern="0">
+                        <a:rPr lang="en-US" sz="2550" dirty="0" spc="11" kern="0">
                           <a:solidFill>
                             <a:srgbClr val="14161C"/>
                           </a:solidFill>
@@ -6796,7 +6851,7 @@
                           <a:ea typeface="Be Vietnam Pro" pitchFamily="34" charset="-122"/>
                           <a:cs typeface="Be Vietnam Pro" pitchFamily="34" charset="-120"/>
                         </a:rPr>
-                        <a:t>Độ</a:t>
+                        <a:t>Mức</a:t>
                       </a:r>
                       <a:r>
                         <a:rPr lang="en-US" sz="2550" dirty="0" spc="5" kern="0">
@@ -7275,7 +7330,7 @@
                         <a:buNone/>
                       </a:pPr>
                       <a:r>
-                        <a:rPr lang="en-US" sz="2550" dirty="0" spc="1" kern="0">
+                        <a:rPr lang="en-US" sz="2550" dirty="0" spc="9" kern="0">
                           <a:solidFill>
                             <a:srgbClr val="14161C"/>
                           </a:solidFill>
@@ -7283,10 +7338,10 @@
                           <a:ea typeface="Be Vietnam Pro" pitchFamily="34" charset="-122"/>
                           <a:cs typeface="Be Vietnam Pro" pitchFamily="34" charset="-120"/>
                         </a:rPr>
-                        <a:t>Cộng</a:t>
+                        <a:t>Sức</a:t>
                       </a:r>
                       <a:r>
-                        <a:rPr lang="en-US" sz="2550" dirty="0" spc="10" kern="0">
+                        <a:rPr lang="en-US" sz="2550" dirty="0" spc="5" kern="0">
                           <a:solidFill>
                             <a:srgbClr val="14161C"/>
                           </a:solidFill>
@@ -7294,223 +7349,7 @@
                           <a:ea typeface="Be Vietnam Pro" pitchFamily="34" charset="-122"/>
                           <a:cs typeface="Be Vietnam Pro" pitchFamily="34" charset="-120"/>
                         </a:rPr>
-                        <a:t> đồng</a:t>
-                      </a:r>
-                      <a:endParaRPr lang="en-US" sz="1200" dirty="0"/>
-                    </a:p>
-                  </a:txBody>
-                  <a:tcPr marL="304800" marR="304800" marT="304800" marB="304800" anchor="ctr">
-                    <a:lnL w="0" cap="flat" cmpd="sng" algn="ctr">
-                      <a:noFill/>
-                    </a:lnL>
-                    <a:lnR w="0" cap="flat" cmpd="sng" algn="ctr">
-                      <a:noFill/>
-                    </a:lnR>
-                    <a:lnT w="19050" cap="flat" cmpd="sng" algn="ctr">
-                      <a:solidFill>
-                        <a:srgbClr val="DDD5C1"/>
-                      </a:solidFill>
-                      <a:prstDash val="solid"/>
-                      <a:round/>
-                      <a:headEnd type="none" w="med" len="med"/>
-                      <a:tailEnd type="none" w="med" len="med"/>
-                    </a:lnT>
-                    <a:lnB w="0" cap="flat" cmpd="sng" algn="ctr">
-                      <a:noFill/>
-                    </a:lnB>
-                    <a:solidFill>
-                      <a:srgbClr val="FBF8F2"/>
-                    </a:solidFill>
-                  </a:tcPr>
-                </a:tc>
-                <a:tc>
-                  <a:txBody>
-                    <a:bodyPr/>
-                    <a:lstStyle/>
-                    <a:p>
-                      <a:pPr algn="ctr" indent="0" marL="0">
-                        <a:lnSpc>
-                          <a:spcPts val="3060"/>
-                        </a:lnSpc>
-                        <a:buNone/>
-                      </a:pPr>
-                      <a:r>
-                        <a:rPr lang="en-US" sz="2550" dirty="0" spc="-1" kern="0">
-                          <a:solidFill>
-                            <a:srgbClr val="14161C"/>
-                          </a:solidFill>
-                          <a:latin typeface="Be Vietnam Pro" pitchFamily="34" charset="0"/>
-                          <a:ea typeface="Be Vietnam Pro" pitchFamily="34" charset="-122"/>
-                          <a:cs typeface="Be Vietnam Pro" pitchFamily="34" charset="-120"/>
-                        </a:rPr>
-                        <a:t>?</a:t>
-                      </a:r>
-                      <a:endParaRPr lang="en-US" sz="1200" dirty="0"/>
-                    </a:p>
-                  </a:txBody>
-                  <a:tcPr marL="76200" marR="76200" marT="76200" marB="76200" anchor="ctr">
-                    <a:lnL w="19050" cap="flat" cmpd="sng" algn="ctr">
-                      <a:solidFill>
-                        <a:srgbClr val="DDD5C1"/>
-                      </a:solidFill>
-                      <a:prstDash val="solid"/>
-                      <a:round/>
-                      <a:headEnd type="none" w="med" len="med"/>
-                      <a:tailEnd type="none" w="med" len="med"/>
-                    </a:lnL>
-                    <a:lnR w="0" cap="flat" cmpd="sng" algn="ctr">
-                      <a:noFill/>
-                    </a:lnR>
-                    <a:lnT w="19050" cap="flat" cmpd="sng" algn="ctr">
-                      <a:solidFill>
-                        <a:srgbClr val="DDD5C1"/>
-                      </a:solidFill>
-                      <a:prstDash val="solid"/>
-                      <a:round/>
-                      <a:headEnd type="none" w="med" len="med"/>
-                      <a:tailEnd type="none" w="med" len="med"/>
-                    </a:lnT>
-                    <a:lnB w="0" cap="flat" cmpd="sng" algn="ctr">
-                      <a:noFill/>
-                    </a:lnB>
-                    <a:solidFill>
-                      <a:srgbClr val="FBF8F2"/>
-                    </a:solidFill>
-                  </a:tcPr>
-                </a:tc>
-                <a:tc>
-                  <a:txBody>
-                    <a:bodyPr/>
-                    <a:lstStyle/>
-                    <a:p>
-                      <a:pPr algn="ctr" indent="0" marL="0">
-                        <a:lnSpc>
-                          <a:spcPts val="3060"/>
-                        </a:lnSpc>
-                        <a:buNone/>
-                      </a:pPr>
-                      <a:r>
-                        <a:rPr lang="en-US" sz="2550" dirty="0" spc="-1" kern="0">
-                          <a:solidFill>
-                            <a:srgbClr val="14161C"/>
-                          </a:solidFill>
-                          <a:latin typeface="Be Vietnam Pro" pitchFamily="34" charset="0"/>
-                          <a:ea typeface="Be Vietnam Pro" pitchFamily="34" charset="-122"/>
-                          <a:cs typeface="Be Vietnam Pro" pitchFamily="34" charset="-120"/>
-                        </a:rPr>
-                        <a:t>?</a:t>
-                      </a:r>
-                      <a:endParaRPr lang="en-US" sz="1200" dirty="0"/>
-                    </a:p>
-                  </a:txBody>
-                  <a:tcPr marL="76200" marR="76200" marT="76200" marB="76200" anchor="ctr">
-                    <a:lnL w="19050" cap="flat" cmpd="sng" algn="ctr">
-                      <a:solidFill>
-                        <a:srgbClr val="DDD5C1"/>
-                      </a:solidFill>
-                      <a:prstDash val="solid"/>
-                      <a:round/>
-                      <a:headEnd type="none" w="med" len="med"/>
-                      <a:tailEnd type="none" w="med" len="med"/>
-                    </a:lnL>
-                    <a:lnR w="0" cap="flat" cmpd="sng" algn="ctr">
-                      <a:noFill/>
-                    </a:lnR>
-                    <a:lnT w="19050" cap="flat" cmpd="sng" algn="ctr">
-                      <a:solidFill>
-                        <a:srgbClr val="DDD5C1"/>
-                      </a:solidFill>
-                      <a:prstDash val="solid"/>
-                      <a:round/>
-                      <a:headEnd type="none" w="med" len="med"/>
-                      <a:tailEnd type="none" w="med" len="med"/>
-                    </a:lnT>
-                    <a:lnB w="0" cap="flat" cmpd="sng" algn="ctr">
-                      <a:noFill/>
-                    </a:lnB>
-                    <a:solidFill>
-                      <a:srgbClr val="FBF8F2"/>
-                    </a:solidFill>
-                  </a:tcPr>
-                </a:tc>
-                <a:tc>
-                  <a:txBody>
-                    <a:bodyPr/>
-                    <a:lstStyle/>
-                    <a:p>
-                      <a:pPr algn="ctr" indent="0" marL="0">
-                        <a:lnSpc>
-                          <a:spcPts val="3060"/>
-                        </a:lnSpc>
-                        <a:buNone/>
-                      </a:pPr>
-                      <a:r>
-                        <a:rPr lang="en-US" sz="2550" dirty="0" spc="-1" kern="0">
-                          <a:solidFill>
-                            <a:srgbClr val="14161C"/>
-                          </a:solidFill>
-                          <a:latin typeface="Be Vietnam Pro" pitchFamily="34" charset="0"/>
-                          <a:ea typeface="Be Vietnam Pro" pitchFamily="34" charset="-122"/>
-                          <a:cs typeface="Be Vietnam Pro" pitchFamily="34" charset="-120"/>
-                        </a:rPr>
-                        <a:t>?</a:t>
-                      </a:r>
-                      <a:endParaRPr lang="en-US" sz="1200" dirty="0"/>
-                    </a:p>
-                  </a:txBody>
-                  <a:tcPr marL="76200" marR="76200" marT="76200" marB="76200" anchor="ctr">
-                    <a:lnL w="19050" cap="flat" cmpd="sng" algn="ctr">
-                      <a:solidFill>
-                        <a:srgbClr val="DDD5C1"/>
-                      </a:solidFill>
-                      <a:prstDash val="solid"/>
-                      <a:round/>
-                      <a:headEnd type="none" w="med" len="med"/>
-                      <a:tailEnd type="none" w="med" len="med"/>
-                    </a:lnL>
-                    <a:lnR w="0" cap="flat" cmpd="sng" algn="ctr">
-                      <a:noFill/>
-                    </a:lnR>
-                    <a:lnT w="19050" cap="flat" cmpd="sng" algn="ctr">
-                      <a:solidFill>
-                        <a:srgbClr val="DDD5C1"/>
-                      </a:solidFill>
-                      <a:prstDash val="solid"/>
-                      <a:round/>
-                      <a:headEnd type="none" w="med" len="med"/>
-                      <a:tailEnd type="none" w="med" len="med"/>
-                    </a:lnT>
-                    <a:lnB w="0" cap="flat" cmpd="sng" algn="ctr">
-                      <a:noFill/>
-                    </a:lnB>
-                    <a:solidFill>
-                      <a:srgbClr val="FBF8F2"/>
-                    </a:solidFill>
-                  </a:tcPr>
-                </a:tc>
-              </a:tr>
-              <a:tr h="1104900">
-                <a:tc>
-                  <a:txBody>
-                    <a:bodyPr/>
-                    <a:lstStyle/>
-                    <a:p>
-                      <a:pPr algn="l" indent="0" marL="0">
-                        <a:lnSpc>
-                          <a:spcPts val="3060"/>
-                        </a:lnSpc>
-                        <a:buNone/>
-                      </a:pPr>
-                      <a:r>
-                        <a:rPr lang="en-US" sz="2550" dirty="0" spc="0" kern="0">
-                          <a:solidFill>
-                            <a:srgbClr val="14161C"/>
-                          </a:solidFill>
-                          <a:latin typeface="Be Vietnam Pro" pitchFamily="34" charset="0"/>
-                          <a:ea typeface="Be Vietnam Pro" pitchFamily="34" charset="-122"/>
-                          <a:cs typeface="Be Vietnam Pro" pitchFamily="34" charset="-120"/>
-                        </a:rPr>
-                        <a:t>Chi phí</a:t>
+                        <a:t> người</a:t>
                       </a:r>
                       <a:r>
                         <a:rPr lang="en-US" sz="2550" dirty="0" spc="-14" kern="0">
@@ -7727,6 +7566,222 @@
                   </a:tcPr>
                 </a:tc>
               </a:tr>
+              <a:tr h="1104900">
+                <a:tc>
+                  <a:txBody>
+                    <a:bodyPr/>
+                    <a:lstStyle/>
+                    <a:p>
+                      <a:pPr algn="l" indent="0" marL="0">
+                        <a:lnSpc>
+                          <a:spcPts val="3060"/>
+                        </a:lnSpc>
+                        <a:buNone/>
+                      </a:pPr>
+                      <a:r>
+                        <a:rPr lang="en-US" sz="2550" dirty="0" kern="0">
+                          <a:solidFill>
+                            <a:srgbClr val="14161C"/>
+                          </a:solidFill>
+                          <a:latin typeface="Be Vietnam Pro" pitchFamily="34" charset="0"/>
+                          <a:ea typeface="Be Vietnam Pro" pitchFamily="34" charset="-122"/>
+                          <a:cs typeface="Be Vietnam Pro" pitchFamily="34" charset="-120"/>
+                        </a:rPr>
+                        <a:t>Chi phí ẩn</a:t>
+                      </a:r>
+                      <a:endParaRPr lang="en-US" sz="1200" dirty="0"/>
+                    </a:p>
+                  </a:txBody>
+                  <a:tcPr marL="304800" marR="304800" marT="304800" marB="304800" anchor="ctr">
+                    <a:lnL w="0" cap="flat" cmpd="sng" algn="ctr">
+                      <a:noFill/>
+                    </a:lnL>
+                    <a:lnR w="0" cap="flat" cmpd="sng" algn="ctr">
+                      <a:noFill/>
+                    </a:lnR>
+                    <a:lnT w="19050" cap="flat" cmpd="sng" algn="ctr">
+                      <a:solidFill>
+                        <a:srgbClr val="DDD5C1"/>
+                      </a:solidFill>
+                      <a:prstDash val="solid"/>
+                      <a:round/>
+                      <a:headEnd type="none" w="med" len="med"/>
+                      <a:tailEnd type="none" w="med" len="med"/>
+                    </a:lnT>
+                    <a:lnB w="0" cap="flat" cmpd="sng" algn="ctr">
+                      <a:noFill/>
+                    </a:lnB>
+                    <a:solidFill>
+                      <a:srgbClr val="FBF8F2"/>
+                    </a:solidFill>
+                  </a:tcPr>
+                </a:tc>
+                <a:tc>
+                  <a:txBody>
+                    <a:bodyPr/>
+                    <a:lstStyle/>
+                    <a:p>
+                      <a:pPr algn="ctr" indent="0" marL="0">
+                        <a:lnSpc>
+                          <a:spcPts val="3060"/>
+                        </a:lnSpc>
+                        <a:buNone/>
+                      </a:pPr>
+                      <a:r>
+                        <a:rPr lang="en-US" sz="2550" dirty="0" spc="-1" kern="0">
+                          <a:solidFill>
+                            <a:srgbClr val="14161C"/>
+                          </a:solidFill>
+                          <a:latin typeface="Be Vietnam Pro" pitchFamily="34" charset="0"/>
+                          <a:ea typeface="Be Vietnam Pro" pitchFamily="34" charset="-122"/>
+                          <a:cs typeface="Be Vietnam Pro" pitchFamily="34" charset="-120"/>
+                        </a:rPr>
+                        <a:t>?</a:t>
+                      </a:r>
+                      <a:endParaRPr lang="en-US" sz="1200" dirty="0"/>
+                    </a:p>
+                  </a:txBody>
+                  <a:tcPr marL="76200" marR="76200" marT="76200" marB="76200" anchor="ctr">
+                    <a:lnL w="19050" cap="flat" cmpd="sng" algn="ctr">
+                      <a:solidFill>
+                        <a:srgbClr val="DDD5C1"/>
+                      </a:solidFill>
+                      <a:prstDash val="solid"/>
+                      <a:round/>
+                      <a:headEnd type="none" w="med" len="med"/>
+                      <a:tailEnd type="none" w="med" len="med"/>
+                    </a:lnL>
+                    <a:lnR w="0" cap="flat" cmpd="sng" algn="ctr">
+                      <a:noFill/>
+                    </a:lnR>
+                    <a:lnT w="19050" cap="flat" cmpd="sng" algn="ctr">
+                      <a:solidFill>
+                        <a:srgbClr val="DDD5C1"/>
+                      </a:solidFill>
+                      <a:prstDash val="solid"/>
+                      <a:round/>
+                      <a:headEnd type="none" w="med" len="med"/>
+                      <a:tailEnd type="none" w="med" len="med"/>
+                    </a:lnT>
+                    <a:lnB w="0" cap="flat" cmpd="sng" algn="ctr">
+                      <a:noFill/>
+                    </a:lnB>
+                    <a:solidFill>
+                      <a:srgbClr val="FBF8F2"/>
+                    </a:solidFill>
+                  </a:tcPr>
+                </a:tc>
+                <a:tc>
+                  <a:txBody>
+                    <a:bodyPr/>
+                    <a:lstStyle/>
+                    <a:p>
+                      <a:pPr algn="ctr" indent="0" marL="0">
+                        <a:lnSpc>
+                          <a:spcPts val="3060"/>
+                        </a:lnSpc>
+                        <a:buNone/>
+                      </a:pPr>
+                      <a:r>
+                        <a:rPr lang="en-US" sz="2550" dirty="0" spc="-1" kern="0">
+                          <a:solidFill>
+                            <a:srgbClr val="14161C"/>
+                          </a:solidFill>
+                          <a:latin typeface="Be Vietnam Pro" pitchFamily="34" charset="0"/>
+                          <a:ea typeface="Be Vietnam Pro" pitchFamily="34" charset="-122"/>
+                          <a:cs typeface="Be Vietnam Pro" pitchFamily="34" charset="-120"/>
+                        </a:rPr>
+                        <a:t>?</a:t>
+                      </a:r>
+                      <a:endParaRPr lang="en-US" sz="1200" dirty="0"/>
+                    </a:p>
+                  </a:txBody>
+                  <a:tcPr marL="76200" marR="76200" marT="76200" marB="76200" anchor="ctr">
+                    <a:lnL w="19050" cap="flat" cmpd="sng" algn="ctr">
+                      <a:solidFill>
+                        <a:srgbClr val="DDD5C1"/>
+                      </a:solidFill>
+                      <a:prstDash val="solid"/>
+                      <a:round/>
+                      <a:headEnd type="none" w="med" len="med"/>
+                      <a:tailEnd type="none" w="med" len="med"/>
+                    </a:lnL>
+                    <a:lnR w="0" cap="flat" cmpd="sng" algn="ctr">
+                      <a:noFill/>
+                    </a:lnR>
+                    <a:lnT w="19050" cap="flat" cmpd="sng" algn="ctr">
+                      <a:solidFill>
+                        <a:srgbClr val="DDD5C1"/>
+                      </a:solidFill>
+                      <a:prstDash val="solid"/>
+                      <a:round/>
+                      <a:headEnd type="none" w="med" len="med"/>
+                      <a:tailEnd type="none" w="med" len="med"/>
+                    </a:lnT>
+                    <a:lnB w="0" cap="flat" cmpd="sng" algn="ctr">
+                      <a:noFill/>
+                    </a:lnB>
+                    <a:solidFill>
+                      <a:srgbClr val="FBF8F2"/>
+                    </a:solidFill>
+                  </a:tcPr>
+                </a:tc>
+                <a:tc>
+                  <a:txBody>
+                    <a:bodyPr/>
+                    <a:lstStyle/>
+                    <a:p>
+                      <a:pPr algn="ctr" indent="0" marL="0">
+                        <a:lnSpc>
+                          <a:spcPts val="3060"/>
+                        </a:lnSpc>
+                        <a:buNone/>
+                      </a:pPr>
+                      <a:r>
+                        <a:rPr lang="en-US" sz="2550" dirty="0" spc="-1" kern="0">
+                          <a:solidFill>
+                            <a:srgbClr val="14161C"/>
+                          </a:solidFill>
+                          <a:latin typeface="Be Vietnam Pro" pitchFamily="34" charset="0"/>
+                          <a:ea typeface="Be Vietnam Pro" pitchFamily="34" charset="-122"/>
+                          <a:cs typeface="Be Vietnam Pro" pitchFamily="34" charset="-120"/>
+                        </a:rPr>
+                        <a:t>?</a:t>
+                      </a:r>
+                      <a:endParaRPr lang="en-US" sz="1200" dirty="0"/>
+                    </a:p>
+                  </a:txBody>
+                  <a:tcPr marL="76200" marR="76200" marT="76200" marB="76200" anchor="ctr">
+                    <a:lnL w="19050" cap="flat" cmpd="sng" algn="ctr">
+                      <a:solidFill>
+                        <a:srgbClr val="DDD5C1"/>
+                      </a:solidFill>
+                      <a:prstDash val="solid"/>
+                      <a:round/>
+                      <a:headEnd type="none" w="med" len="med"/>
+                      <a:tailEnd type="none" w="med" len="med"/>
+                    </a:lnL>
+                    <a:lnR w="0" cap="flat" cmpd="sng" algn="ctr">
+                      <a:noFill/>
+                    </a:lnR>
+                    <a:lnT w="19050" cap="flat" cmpd="sng" algn="ctr">
+                      <a:solidFill>
+                        <a:srgbClr val="DDD5C1"/>
+                      </a:solidFill>
+                      <a:prstDash val="solid"/>
+                      <a:round/>
+                      <a:headEnd type="none" w="med" len="med"/>
+                      <a:tailEnd type="none" w="med" len="med"/>
+                    </a:lnT>
+                    <a:lnB w="0" cap="flat" cmpd="sng" algn="ctr">
+                      <a:noFill/>
+                    </a:lnB>
+                    <a:solidFill>
+                      <a:srgbClr val="FBF8F2"/>
+                    </a:solidFill>
+                  </a:tcPr>
+                </a:tc>
+              </a:tr>
             </a:tbl>
           </a:graphicData>
         </a:graphic>
@@ -8330,7 +8385,7 @@
               <a:buNone/>
             </a:pPr>
             <a:r>
-              <a:rPr lang="en-US" sz="30000" dirty="0" kern="0">
+              <a:rPr lang="en-US" sz="30000" dirty="0" spc="-3" kern="0">
                 <a:solidFill>
                   <a:srgbClr val="3DD6A0"/>
                 </a:solidFill>
@@ -8338,7 +8393,7 @@
                 <a:ea typeface="Bricolage Grotesque ExtraBold" pitchFamily="34" charset="-122"/>
                 <a:cs typeface="Bricolage Grotesque ExtraBold" pitchFamily="34" charset="-120"/>
               </a:rPr>
-              <a:t>1</a:t>
+              <a:t>4</a:t>
             </a:r>
             <a:endParaRPr lang="en-US" sz="30000" dirty="0"/>
           </a:p>
@@ -8369,7 +8424,7 @@
               <a:buNone/>
             </a:pPr>
             <a:r>
-              <a:rPr lang="en-US" sz="3600" b="1" dirty="0" spc="1" kern="0">
+              <a:rPr lang="en-US" sz="3600" b="1" dirty="0" spc="-26" kern="0">
                 <a:solidFill>
                   <a:srgbClr val="F3EEE3"/>
                 </a:solidFill>
@@ -8377,10 +8432,10 @@
                 <a:ea typeface="Be Vietnam Pro" pitchFamily="34" charset="-122"/>
                 <a:cs typeface="Be Vietnam Pro" pitchFamily="34" charset="-120"/>
               </a:rPr>
-              <a:t>cụm</a:t>
-            </a:r>
-            <a:r>
-              <a:rPr lang="en-US" sz="3600" b="1" dirty="0" spc="2" kern="0">
+              <a:t>trên</a:t>
+            </a:r>
+            <a:r>
+              <a:rPr lang="en-US" sz="3600" b="1" dirty="0" spc="5" kern="0">
                 <a:solidFill>
                   <a:srgbClr val="F3EEE3"/>
                 </a:solidFill>
@@ -8388,7 +8443,18 @@
                 <a:ea typeface="Be Vietnam Pro" pitchFamily="34" charset="-122"/>
                 <a:cs typeface="Be Vietnam Pro" pitchFamily="34" charset="-120"/>
               </a:rPr>
-              <a:t> thử</a:t>
+              <a:t> 5</a:t>
+            </a:r>
+            <a:r>
+              <a:rPr lang="en-US" sz="3600" b="1" dirty="0" spc="17" kern="0">
+                <a:solidFill>
+                  <a:srgbClr val="F3EEE3"/>
+                </a:solidFill>
+                <a:latin typeface="Be Vietnam Pro" pitchFamily="34" charset="0"/>
+                <a:ea typeface="Be Vietnam Pro" pitchFamily="34" charset="-122"/>
+                <a:cs typeface="Be Vietnam Pro" pitchFamily="34" charset="-120"/>
+              </a:rPr>
+              <a:t> bước</a:t>
             </a:r>
             <a:endParaRPr lang="en-US" sz="3600" dirty="0"/>
           </a:p>
@@ -8413,9 +8479,9 @@
           <a:solidFill>
             <a:srgbClr val="1E212B"/>
           </a:solidFill>
-          <a:ln w="28575">
+          <a:ln w="19050">
             <a:solidFill>
-              <a:srgbClr val="3DD6A0"/>
+              <a:srgbClr val="3A3F4D"/>
             </a:solidFill>
             <a:prstDash val="solid"/>
           </a:ln>
@@ -8429,50 +8495,8 @@
         </p:nvSpPr>
         <p:spPr>
           <a:xfrm>
-            <a:off x="9848850" y="3143250"/>
-            <a:ext cx="7048500" cy="4000500"/>
-          </a:xfrm>
-          <a:prstGeom prst="rect">
-            <a:avLst/>
-          </a:prstGeom>
-          <a:noFill/>
-          <a:ln/>
-        </p:spPr>
-        <p:txBody>
-          <a:bodyPr wrap="square" lIns="0" tIns="304800" rIns="0" bIns="-304800" rtlCol="0" anchor="t"/>
-          <a:lstStyle/>
-          <a:p>
-            <a:pPr algn="ctr" indent="0" marL="0">
-              <a:lnSpc>
-                <a:spcPts val="30000"/>
-              </a:lnSpc>
-              <a:buNone/>
-            </a:pPr>
-            <a:r>
-              <a:rPr lang="en-US" sz="30000" dirty="0" kern="0">
-                <a:solidFill>
-                  <a:srgbClr val="3DD6A0"/>
-                </a:solidFill>
-                <a:latin typeface="Bricolage Grotesque ExtraBold" pitchFamily="34" charset="0"/>
-                <a:ea typeface="Bricolage Grotesque ExtraBold" pitchFamily="34" charset="-122"/>
-                <a:cs typeface="Bricolage Grotesque ExtraBold" pitchFamily="34" charset="-120"/>
-              </a:rPr>
-              <a:t>1</a:t>
-            </a:r>
-            <a:endParaRPr lang="en-US" sz="30000" dirty="0"/>
-          </a:p>
-        </p:txBody>
-      </p:sp>
-      <p:sp>
-        <p:nvSpPr>
-          <p:cNvPr id="9" name="Text 7"/>
-          <p:cNvSpPr/>
-          <p:nvPr/>
-        </p:nvSpPr>
-        <p:spPr>
-          <a:xfrm>
-            <a:off x="9848850" y="7429500"/>
-            <a:ext cx="7048500" cy="666750"/>
+            <a:off x="9848850" y="3619500"/>
+            <a:ext cx="7048500" cy="419100"/>
           </a:xfrm>
           <a:prstGeom prst="rect">
             <a:avLst/>
@@ -8484,43 +8508,151 @@
           <a:bodyPr wrap="square" lIns="0" tIns="0" rIns="0" bIns="0" rtlCol="0" anchor="t"/>
           <a:lstStyle/>
           <a:p>
-            <a:pPr algn="ctr" indent="0" marL="0">
+            <a:pPr algn="l" indent="0" marL="0">
               <a:buNone/>
             </a:pPr>
             <a:r>
-              <a:rPr lang="en-US" sz="3600" b="1" dirty="0" spc="-11" kern="0">
+              <a:rPr lang="en-US" sz="2100" b="1" spc="152" kern="0" dirty="0">
+                <a:solidFill>
+                  <a:srgbClr val="9AA0B5"/>
+                </a:solidFill>
+                <a:latin typeface="Be Vietnam Pro" pitchFamily="34" charset="0"/>
+                <a:ea typeface="Be Vietnam Pro" pitchFamily="34" charset="-122"/>
+                <a:cs typeface="Be Vietnam Pro" pitchFamily="34" charset="-120"/>
+              </a:rPr>
+              <a:t>THỨ</a:t>
+            </a:r>
+            <a:r>
+              <a:rPr lang="en-US" sz="2100" b="1" spc="151" kern="0" dirty="0">
+                <a:solidFill>
+                  <a:srgbClr val="9AA0B5"/>
+                </a:solidFill>
+                <a:latin typeface="Be Vietnam Pro" pitchFamily="34" charset="0"/>
+                <a:ea typeface="Be Vietnam Pro" pitchFamily="34" charset="-122"/>
+                <a:cs typeface="Be Vietnam Pro" pitchFamily="34" charset="-120"/>
+              </a:rPr>
+              <a:t> TỰ</a:t>
+            </a:r>
+            <a:endParaRPr lang="en-US" sz="2100" dirty="0"/>
+          </a:p>
+        </p:txBody>
+      </p:sp>
+      <p:sp>
+        <p:nvSpPr>
+          <p:cNvPr id="9" name="Text 7"/>
+          <p:cNvSpPr/>
+          <p:nvPr/>
+        </p:nvSpPr>
+        <p:spPr>
+          <a:xfrm>
+            <a:off x="9848850" y="4381500"/>
+            <a:ext cx="7048500" cy="2857500"/>
+          </a:xfrm>
+          <a:prstGeom prst="rect">
+            <a:avLst/>
+          </a:prstGeom>
+          <a:noFill/>
+          <a:ln/>
+        </p:spPr>
+        <p:txBody>
+          <a:bodyPr wrap="square" lIns="0" tIns="15240" rIns="0" bIns="-15240" rtlCol="0" anchor="t"/>
+          <a:lstStyle/>
+          <a:p>
+            <a:pPr algn="l" indent="0" marL="0">
+              <a:lnSpc>
+                <a:spcPts val="5520"/>
+              </a:lnSpc>
+              <a:buNone/>
+            </a:pPr>
+            <a:r>
+              <a:rPr lang="en-US" sz="4800" dirty="0" spc="2" kern="0">
                 <a:solidFill>
                   <a:srgbClr val="F3EEE3"/>
                 </a:solidFill>
-                <a:latin typeface="Be Vietnam Pro" pitchFamily="34" charset="0"/>
-                <a:ea typeface="Be Vietnam Pro" pitchFamily="34" charset="-122"/>
-                <a:cs typeface="Be Vietnam Pro" pitchFamily="34" charset="-120"/>
-              </a:rPr>
-              <a:t>nhóm</a:t>
-            </a:r>
-            <a:r>
-              <a:rPr lang="en-US" sz="3600" b="1" dirty="0" spc="-3" kern="0">
+                <a:latin typeface="Bricolage Grotesque ExtraBold" pitchFamily="34" charset="0"/>
+                <a:ea typeface="Bricolage Grotesque ExtraBold" pitchFamily="34" charset="-122"/>
+                <a:cs typeface="Bricolage Grotesque ExtraBold" pitchFamily="34" charset="-120"/>
+              </a:rPr>
+              <a:t>Thử</a:t>
+            </a:r>
+            <a:r>
+              <a:rPr lang="en-US" sz="4800" dirty="0" spc="-16" kern="0">
                 <a:solidFill>
                   <a:srgbClr val="F3EEE3"/>
                 </a:solidFill>
-                <a:latin typeface="Be Vietnam Pro" pitchFamily="34" charset="0"/>
-                <a:ea typeface="Be Vietnam Pro" pitchFamily="34" charset="-122"/>
-                <a:cs typeface="Be Vietnam Pro" pitchFamily="34" charset="-120"/>
-              </a:rPr>
-              <a:t> dùng</a:t>
-            </a:r>
-            <a:r>
-              <a:rPr lang="en-US" sz="3600" b="1" dirty="0" spc="2" kern="0">
+                <a:latin typeface="Bricolage Grotesque ExtraBold" pitchFamily="34" charset="0"/>
+                <a:ea typeface="Bricolage Grotesque ExtraBold" pitchFamily="34" charset="-122"/>
+                <a:cs typeface="Bricolage Grotesque ExtraBold" pitchFamily="34" charset="-120"/>
+              </a:rPr>
+              <a:t> nhỏ,</a:t>
+            </a:r>
+            <a:r>
+              <a:rPr lang="en-US" sz="4800" dirty="0" spc="-17" kern="0">
                 <a:solidFill>
                   <a:srgbClr val="F3EEE3"/>
                 </a:solidFill>
-                <a:latin typeface="Be Vietnam Pro" pitchFamily="34" charset="0"/>
-                <a:ea typeface="Be Vietnam Pro" pitchFamily="34" charset="-122"/>
-                <a:cs typeface="Be Vietnam Pro" pitchFamily="34" charset="-120"/>
-              </a:rPr>
-              <a:t> thử</a:t>
-            </a:r>
-            <a:endParaRPr lang="en-US" sz="3600" dirty="0"/>
+                <a:latin typeface="Bricolage Grotesque ExtraBold" pitchFamily="34" charset="0"/>
+                <a:ea typeface="Bricolage Grotesque ExtraBold" pitchFamily="34" charset="-122"/>
+                <a:cs typeface="Bricolage Grotesque ExtraBold" pitchFamily="34" charset="-120"/>
+              </a:rPr>
+              <a:t> rồi</a:t>
+            </a:r>
+            <a:r>
+              <a:rPr lang="en-US" sz="4800" dirty="0" spc="-23" kern="0">
+                <a:solidFill>
+                  <a:srgbClr val="F3EEE3"/>
+                </a:solidFill>
+                <a:latin typeface="Bricolage Grotesque ExtraBold" pitchFamily="34" charset="0"/>
+                <a:ea typeface="Bricolage Grotesque ExtraBold" pitchFamily="34" charset="-122"/>
+                <a:cs typeface="Bricolage Grotesque ExtraBold" pitchFamily="34" charset="-120"/>
+              </a:rPr>
+              <a:t> mới</a:t>
+            </a:r>
+            <a:r>
+              <a:rPr lang="en-US" sz="4800" dirty="0" spc="-2" kern="0">
+                <a:solidFill>
+                  <a:srgbClr val="F3EEE3"/>
+                </a:solidFill>
+                <a:latin typeface="Bricolage Grotesque ExtraBold" pitchFamily="34" charset="0"/>
+                <a:ea typeface="Bricolage Grotesque ExtraBold" pitchFamily="34" charset="-122"/>
+                <a:cs typeface="Bricolage Grotesque ExtraBold" pitchFamily="34" charset="-120"/>
+              </a:rPr>
+              <a:t> ghi</a:t>
+            </a:r>
+            <a:r>
+              <a:rPr lang="en-US" sz="4800" dirty="0" spc="-3" kern="0">
+                <a:solidFill>
+                  <a:srgbClr val="F3EEE3"/>
+                </a:solidFill>
+                <a:latin typeface="Bricolage Grotesque ExtraBold" pitchFamily="34" charset="0"/>
+                <a:ea typeface="Bricolage Grotesque ExtraBold" pitchFamily="34" charset="-122"/>
+                <a:cs typeface="Bricolage Grotesque ExtraBold" pitchFamily="34" charset="-120"/>
+              </a:rPr>
+              <a:t> lại</a:t>
+            </a:r>
+            <a:r>
+              <a:rPr lang="en-US" sz="4800" dirty="0" spc="2" kern="0">
+                <a:solidFill>
+                  <a:srgbClr val="F3EEE3"/>
+                </a:solidFill>
+                <a:latin typeface="Bricolage Grotesque ExtraBold" pitchFamily="34" charset="0"/>
+                <a:ea typeface="Bricolage Grotesque ExtraBold" pitchFamily="34" charset="-122"/>
+                <a:cs typeface="Bricolage Grotesque ExtraBold" pitchFamily="34" charset="-120"/>
+              </a:rPr>
+              <a:t> quyết</a:t>
+            </a:r>
+            <a:r>
+              <a:rPr lang="en-US" sz="4800" dirty="0" spc="12" kern="0">
+                <a:solidFill>
+                  <a:srgbClr val="F3EEE3"/>
+                </a:solidFill>
+                <a:latin typeface="Bricolage Grotesque ExtraBold" pitchFamily="34" charset="0"/>
+                <a:ea typeface="Bricolage Grotesque ExtraBold" pitchFamily="34" charset="-122"/>
+                <a:cs typeface="Bricolage Grotesque ExtraBold" pitchFamily="34" charset="-120"/>
+              </a:rPr>
+              <a:t> định.</a:t>
+            </a:r>
+            <a:endParaRPr lang="en-US" sz="4800" dirty="0"/>
           </a:p>
         </p:txBody>
       </p:sp>
@@ -9144,7 +9276,7 @@
               <a:buNone/>
             </a:pPr>
             <a:r>
-              <a:rPr lang="en-US" sz="3740" dirty="0" spc="-19" kern="0">
+              <a:rPr lang="en-US" sz="3750" dirty="0" spc="-1" kern="0">
                 <a:solidFill>
                   <a:srgbClr val="E8472B"/>
                 </a:solidFill>
@@ -9152,10 +9284,10 @@
                 <a:ea typeface="Bricolage Grotesque ExtraBold" pitchFamily="34" charset="-122"/>
                 <a:cs typeface="Bricolage Grotesque ExtraBold" pitchFamily="34" charset="-120"/>
               </a:rPr>
-              <a:t>Lý</a:t>
-            </a:r>
-            <a:r>
-              <a:rPr lang="en-US" sz="3740" dirty="0" spc="-1" kern="0">
+              <a:t>Công cụ</a:t>
+            </a:r>
+            <a:r>
+              <a:rPr lang="en-US" sz="3750" dirty="0" spc="8" kern="0">
                 <a:solidFill>
                   <a:srgbClr val="E8472B"/>
                 </a:solidFill>
@@ -9163,10 +9295,10 @@
                 <a:ea typeface="Bricolage Grotesque ExtraBold" pitchFamily="34" charset="-122"/>
                 <a:cs typeface="Bricolage Grotesque ExtraBold" pitchFamily="34" charset="-120"/>
               </a:rPr>
-              <a:t> do</a:t>
-            </a:r>
-            <a:r>
-              <a:rPr lang="en-US" sz="3740" dirty="0" spc="0" kern="0">
+              <a:t> đã</a:t>
+            </a:r>
+            <a:r>
+              <a:rPr lang="en-US" sz="3750" dirty="0" spc="-3" kern="0">
                 <a:solidFill>
                   <a:srgbClr val="E8472B"/>
                 </a:solidFill>
@@ -9176,7 +9308,7 @@
               </a:rPr>
               <a:t> chọn</a:t>
             </a:r>
-            <a:endParaRPr lang="en-US" sz="3740" dirty="0"/>
+            <a:endParaRPr lang="en-US" sz="3750" dirty="0"/>
           </a:p>
         </p:txBody>
       </p:sp>
@@ -9354,7 +9486,7 @@
               <a:buNone/>
             </a:pPr>
             <a:r>
-              <a:rPr lang="en-US" sz="3740" dirty="0" spc="3" kern="0">
+              <a:rPr lang="en-US" sz="3750" dirty="0" spc="-21" kern="0">
                 <a:solidFill>
                   <a:srgbClr val="E8472B"/>
                 </a:solidFill>
@@ -9362,10 +9494,10 @@
                 <a:ea typeface="Bricolage Grotesque ExtraBold" pitchFamily="34" charset="-122"/>
                 <a:cs typeface="Bricolage Grotesque ExtraBold" pitchFamily="34" charset="-120"/>
               </a:rPr>
-              <a:t>Điều</a:t>
-            </a:r>
-            <a:r>
-              <a:rPr lang="en-US" sz="3740" dirty="0" spc="0" kern="0">
+              <a:t>Lý</a:t>
+            </a:r>
+            <a:r>
+              <a:rPr lang="en-US" sz="3750" dirty="0" spc="-1" kern="0">
                 <a:solidFill>
                   <a:srgbClr val="E8472B"/>
                 </a:solidFill>
@@ -9373,10 +9505,10 @@
                 <a:ea typeface="Bricolage Grotesque ExtraBold" pitchFamily="34" charset="-122"/>
                 <a:cs typeface="Bricolage Grotesque ExtraBold" pitchFamily="34" charset="-120"/>
               </a:rPr>
-              <a:t> kiện</a:t>
-            </a:r>
-            <a:r>
-              <a:rPr lang="en-US" sz="3740" dirty="0" spc="-43" kern="0">
+              <a:t> do</a:t>
+            </a:r>
+            <a:r>
+              <a:rPr lang="en-US" sz="3750" dirty="0" spc="-3" kern="0">
                 <a:solidFill>
                   <a:srgbClr val="E8472B"/>
                 </a:solidFill>
@@ -9384,20 +9516,9 @@
                 <a:ea typeface="Bricolage Grotesque ExtraBold" pitchFamily="34" charset="-122"/>
                 <a:cs typeface="Bricolage Grotesque ExtraBold" pitchFamily="34" charset="-120"/>
               </a:rPr>
-              <a:t> xem</a:t>
-            </a:r>
-            <a:r>
-              <a:rPr lang="en-US" sz="3740" dirty="0" spc="1" kern="0">
-                <a:solidFill>
-                  <a:srgbClr val="E8472B"/>
-                </a:solidFill>
-                <a:latin typeface="Bricolage Grotesque ExtraBold" pitchFamily="34" charset="0"/>
-                <a:ea typeface="Bricolage Grotesque ExtraBold" pitchFamily="34" charset="-122"/>
-                <a:cs typeface="Bricolage Grotesque ExtraBold" pitchFamily="34" charset="-120"/>
-              </a:rPr>
-              <a:t> lại</a:t>
-            </a:r>
-            <a:endParaRPr lang="en-US" sz="3740" dirty="0"/>
+              <a:t> chọn</a:t>
+            </a:r>
+            <a:endParaRPr lang="en-US" sz="3750" dirty="0"/>
           </a:p>
         </p:txBody>
       </p:sp>

--- a/system-design-101/vi/lessons/sd-13-008/slides/sd-13-008.pptx
+++ b/system-design-101/vi/lessons/sd-13-008/slides/sd-13-008.pptx
@@ -1790,7 +1790,7 @@
         <p:spPr>
           <a:xfrm>
             <a:off x="914400" y="1524000"/>
-            <a:ext cx="8191500" cy="2286000"/>
+            <a:ext cx="8191500" cy="3238500"/>
           </a:xfrm>
           <a:prstGeom prst="rect">
             <a:avLst/>
@@ -1799,17 +1799,17 @@
           <a:ln/>
         </p:spPr>
         <p:txBody>
-          <a:bodyPr wrap="square" lIns="0" tIns="59563" rIns="0" bIns="-59563" rtlCol="0" anchor="t"/>
+          <a:bodyPr wrap="square" lIns="0" tIns="72009" rIns="0" bIns="-72009" rtlCol="0" anchor="t"/>
           <a:lstStyle/>
           <a:p>
             <a:pPr algn="l" indent="0" marL="0">
               <a:lnSpc>
-                <a:spcPts val="6968"/>
+                <a:spcPts val="8424"/>
               </a:lnSpc>
               <a:buNone/>
             </a:pPr>
             <a:r>
-              <a:rPr lang="en-US" sz="6700" dirty="0" spc="5" kern="0">
+              <a:rPr lang="en-US" sz="8100" dirty="0" spc="6" kern="0">
                 <a:solidFill>
                   <a:srgbClr val="F3EEE3"/>
                 </a:solidFill>
@@ -1820,7 +1820,7 @@
               <a:t>Chọn</a:t>
             </a:r>
             <a:r>
-              <a:rPr lang="en-US" sz="6700" dirty="0" spc="0" kern="0">
+              <a:rPr lang="en-US" sz="8100" dirty="0" spc="0" kern="0">
                 <a:solidFill>
                   <a:srgbClr val="F3EEE3"/>
                 </a:solidFill>
@@ -1828,10 +1828,10 @@
                 <a:ea typeface="Bricolage Grotesque ExtraBold" pitchFamily="34" charset="-122"/>
                 <a:cs typeface="Bricolage Grotesque ExtraBold" pitchFamily="34" charset="-120"/>
               </a:rPr>
-              <a:t> công</a:t>
-            </a:r>
-            <a:r>
-              <a:rPr lang="en-US" sz="6700" dirty="0" spc="-2" kern="0">
+              <a:t> công cụ</a:t>
+            </a:r>
+            <a:r>
+              <a:rPr lang="en-US" sz="8100" dirty="0" spc="-29" kern="0">
                 <a:solidFill>
                   <a:srgbClr val="F3EEE3"/>
                 </a:solidFill>
@@ -1839,10 +1839,10 @@
                 <a:ea typeface="Bricolage Grotesque ExtraBold" pitchFamily="34" charset="-122"/>
                 <a:cs typeface="Bricolage Grotesque ExtraBold" pitchFamily="34" charset="-120"/>
               </a:rPr>
-              <a:t> cụ</a:t>
-            </a:r>
-            <a:r>
-              <a:rPr lang="en-US" sz="6700" dirty="0" spc="-25" kern="0">
+              <a:t> Kubernetes</a:t>
+            </a:r>
+            <a:r>
+              <a:rPr lang="en-US" sz="8100" dirty="0" spc="1" kern="0">
                 <a:solidFill>
                   <a:srgbClr val="F3EEE3"/>
                 </a:solidFill>
@@ -1850,10 +1850,10 @@
                 <a:ea typeface="Bricolage Grotesque ExtraBold" pitchFamily="34" charset="-122"/>
                 <a:cs typeface="Bricolage Grotesque ExtraBold" pitchFamily="34" charset="-120"/>
               </a:rPr>
-              <a:t> Kubernetes</a:t>
-            </a:r>
-            <a:r>
-              <a:rPr lang="en-US" sz="6700" dirty="0" spc="0" kern="0">
+              <a:t> theo</a:t>
+            </a:r>
+            <a:r>
+              <a:rPr lang="en-US" sz="8100" dirty="0" spc="-54" kern="0">
                 <a:solidFill>
                   <a:srgbClr val="F3EEE3"/>
                 </a:solidFill>
@@ -1861,20 +1861,9 @@
                 <a:ea typeface="Bricolage Grotesque ExtraBold" pitchFamily="34" charset="-122"/>
                 <a:cs typeface="Bricolage Grotesque ExtraBold" pitchFamily="34" charset="-120"/>
               </a:rPr>
-              <a:t> theo</a:t>
-            </a:r>
-            <a:r>
-              <a:rPr lang="en-US" sz="6700" dirty="0" spc="-42" kern="0">
-                <a:solidFill>
-                  <a:srgbClr val="F3EEE3"/>
-                </a:solidFill>
-                <a:latin typeface="Bricolage Grotesque ExtraBold" pitchFamily="34" charset="0"/>
-                <a:ea typeface="Bricolage Grotesque ExtraBold" pitchFamily="34" charset="-122"/>
-                <a:cs typeface="Bricolage Grotesque ExtraBold" pitchFamily="34" charset="-120"/>
-              </a:rPr>
               <a:t> lớp</a:t>
             </a:r>
-            <a:endParaRPr lang="en-US" sz="6700" dirty="0"/>
+            <a:endParaRPr lang="en-US" sz="8100" dirty="0"/>
           </a:p>
         </p:txBody>
       </p:sp>
@@ -1886,7 +1875,7 @@
         </p:nvSpPr>
         <p:spPr>
           <a:xfrm>
-            <a:off x="914400" y="4191000"/>
+            <a:off x="914400" y="5143500"/>
             <a:ext cx="8191500" cy="1047750"/>
           </a:xfrm>
           <a:prstGeom prst="rect">
@@ -1983,7 +1972,7 @@
         </p:nvSpPr>
         <p:spPr>
           <a:xfrm>
-            <a:off x="914400" y="5334000"/>
+            <a:off x="914400" y="6286500"/>
             <a:ext cx="8191500" cy="419100"/>
           </a:xfrm>
           <a:prstGeom prst="rect">
@@ -2138,7 +2127,7 @@
               <a:t> nhóm</a:t>
             </a:r>
             <a:r>
-              <a:rPr lang="en-US" sz="1650" dirty="0" spc="-3" kern="0">
+              <a:rPr lang="en-US" sz="1650" dirty="0" spc="-4" kern="0">
                 <a:solidFill>
                   <a:srgbClr val="9AA0B5"/>
                 </a:solidFill>
@@ -2146,10 +2135,10 @@
                 <a:ea typeface="Be Vietnam Pro" pitchFamily="34" charset="-122"/>
                 <a:cs typeface="Be Vietnam Pro" pitchFamily="34" charset="-120"/>
               </a:rPr>
-              <a:t> Quan</a:t>
-            </a:r>
-            <a:r>
-              <a:rPr lang="en-US" sz="1650" dirty="0" spc="-9" kern="0">
+              <a:t> DevOps</a:t>
+            </a:r>
+            <a:r>
+              <a:rPr lang="en-US" sz="1650" dirty="0" spc="-7" kern="0">
                 <a:solidFill>
                   <a:srgbClr val="9AA0B5"/>
                 </a:solidFill>
@@ -2157,7 +2146,7 @@
                 <a:ea typeface="Be Vietnam Pro" pitchFamily="34" charset="-122"/>
                 <a:cs typeface="Be Vietnam Pro" pitchFamily="34" charset="-120"/>
               </a:rPr>
-              <a:t> sát</a:t>
+              <a:t> và</a:t>
             </a:r>
             <a:r>
               <a:rPr lang="en-US" sz="1650" dirty="0" spc="3" kern="0">
@@ -2168,18 +2157,7 @@
                 <a:ea typeface="Be Vietnam Pro" pitchFamily="34" charset="-122"/>
                 <a:cs typeface="Be Vietnam Pro" pitchFamily="34" charset="-120"/>
               </a:rPr>
-              <a:t> hệ</a:t>
-            </a:r>
-            <a:r>
-              <a:rPr lang="en-US" sz="1650" dirty="0" spc="1" kern="0">
-                <a:solidFill>
-                  <a:srgbClr val="9AA0B5"/>
-                </a:solidFill>
-                <a:latin typeface="Be Vietnam Pro" pitchFamily="34" charset="0"/>
-                <a:ea typeface="Be Vietnam Pro" pitchFamily="34" charset="-122"/>
-                <a:cs typeface="Be Vietnam Pro" pitchFamily="34" charset="-120"/>
-              </a:rPr>
-              <a:t> thống</a:t>
+              <a:t> CI/CD</a:t>
             </a:r>
             <a:endParaRPr lang="en-US" sz="1650" dirty="0"/>
           </a:p>
@@ -11473,7 +11451,7 @@
         <p:spPr>
           <a:xfrm>
             <a:off x="914400" y="1333500"/>
-            <a:ext cx="16459200" cy="1238250"/>
+            <a:ext cx="16459200" cy="1085850"/>
           </a:xfrm>
           <a:prstGeom prst="rect">
             <a:avLst/>
@@ -11489,7 +11467,7 @@
               <a:buNone/>
             </a:pPr>
             <a:r>
-              <a:rPr lang="en-US" sz="6000" dirty="0" spc="8" kern="0">
+              <a:rPr lang="en-US" sz="6900" dirty="0" spc="-20" kern="0">
                 <a:solidFill>
                   <a:srgbClr val="F3EEE3"/>
                 </a:solidFill>
@@ -11497,10 +11475,10 @@
                 <a:ea typeface="Bricolage Grotesque ExtraBold" pitchFamily="34" charset="-122"/>
                 <a:cs typeface="Bricolage Grotesque ExtraBold" pitchFamily="34" charset="-120"/>
               </a:rPr>
-              <a:t>Dự</a:t>
-            </a:r>
-            <a:r>
-              <a:rPr lang="en-US" sz="6000" dirty="0" spc="0" kern="0">
+              <a:t>Graduated</a:t>
+            </a:r>
+            <a:r>
+              <a:rPr lang="en-US" sz="6900" dirty="0" spc="-18" kern="0">
                 <a:solidFill>
                   <a:srgbClr val="F3EEE3"/>
                 </a:solidFill>
@@ -11508,10 +11486,10 @@
                 <a:ea typeface="Bricolage Grotesque ExtraBold" pitchFamily="34" charset="-122"/>
                 <a:cs typeface="Bricolage Grotesque ExtraBold" pitchFamily="34" charset="-120"/>
               </a:rPr>
-              <a:t> án</a:t>
-            </a:r>
-            <a:r>
-              <a:rPr lang="en-US" sz="6000" dirty="0" spc="-16" kern="0">
+              <a:t> thì</a:t>
+            </a:r>
+            <a:r>
+              <a:rPr lang="en-US" sz="6900" dirty="0" spc="3" kern="0">
                 <a:solidFill>
                   <a:srgbClr val="F3EEE3"/>
                 </a:solidFill>
@@ -11519,10 +11497,10 @@
                 <a:ea typeface="Bricolage Grotesque ExtraBold" pitchFamily="34" charset="-122"/>
                 <a:cs typeface="Bricolage Grotesque ExtraBold" pitchFamily="34" charset="-120"/>
               </a:rPr>
-              <a:t> graduated</a:t>
-            </a:r>
-            <a:r>
-              <a:rPr lang="en-US" sz="6000" dirty="0" spc="0" kern="0">
+              <a:t> luôn</a:t>
+            </a:r>
+            <a:r>
+              <a:rPr lang="en-US" sz="6900" dirty="0" spc="-66" kern="0">
                 <a:solidFill>
                   <a:srgbClr val="F3EEE3"/>
                 </a:solidFill>
@@ -11530,42 +11508,9 @@
                 <a:ea typeface="Bricolage Grotesque ExtraBold" pitchFamily="34" charset="-122"/>
                 <a:cs typeface="Bricolage Grotesque ExtraBold" pitchFamily="34" charset="-120"/>
               </a:rPr>
-              <a:t> của CNCF</a:t>
-            </a:r>
-            <a:r>
-              <a:rPr lang="en-US" sz="6000" dirty="0" spc="-17" kern="0">
-                <a:solidFill>
-                  <a:srgbClr val="F3EEE3"/>
-                </a:solidFill>
-                <a:latin typeface="Bricolage Grotesque ExtraBold" pitchFamily="34" charset="0"/>
-                <a:ea typeface="Bricolage Grotesque ExtraBold" pitchFamily="34" charset="-122"/>
-                <a:cs typeface="Bricolage Grotesque ExtraBold" pitchFamily="34" charset="-120"/>
-              </a:rPr>
-              <a:t> thì</a:t>
-            </a:r>
-            <a:r>
-              <a:rPr lang="en-US" sz="6000" dirty="0" spc="2" kern="0">
-                <a:solidFill>
-                  <a:srgbClr val="F3EEE3"/>
-                </a:solidFill>
-                <a:latin typeface="Bricolage Grotesque ExtraBold" pitchFamily="34" charset="0"/>
-                <a:ea typeface="Bricolage Grotesque ExtraBold" pitchFamily="34" charset="-122"/>
-                <a:cs typeface="Bricolage Grotesque ExtraBold" pitchFamily="34" charset="-120"/>
-              </a:rPr>
-              <a:t> luôn</a:t>
-            </a:r>
-            <a:r>
-              <a:rPr lang="en-US" sz="6000" dirty="0" spc="-57" kern="0">
-                <a:solidFill>
-                  <a:srgbClr val="F3EEE3"/>
-                </a:solidFill>
-                <a:latin typeface="Bricolage Grotesque ExtraBold" pitchFamily="34" charset="0"/>
-                <a:ea typeface="Bricolage Grotesque ExtraBold" pitchFamily="34" charset="-122"/>
-                <a:cs typeface="Bricolage Grotesque ExtraBold" pitchFamily="34" charset="-120"/>
-              </a:rPr>
               <a:t> hợp?</a:t>
             </a:r>
-            <a:endParaRPr lang="en-US" sz="6000" dirty="0"/>
+            <a:endParaRPr lang="en-US" sz="6900" dirty="0"/>
           </a:p>
         </p:txBody>
       </p:sp>
@@ -12656,7 +12601,7 @@
         <p:spPr>
           <a:xfrm>
             <a:off x="914400" y="1333500"/>
-            <a:ext cx="16459200" cy="1143000"/>
+            <a:ext cx="16459200" cy="1085850"/>
           </a:xfrm>
           <a:prstGeom prst="rect">
             <a:avLst/>
@@ -12672,7 +12617,7 @@
               <a:buNone/>
             </a:pPr>
             <a:r>
-              <a:rPr lang="en-US" sz="6600" dirty="0" spc="-2" kern="0">
+              <a:rPr lang="en-US" sz="6900" dirty="0" spc="-4" kern="0">
                 <a:solidFill>
                   <a:srgbClr val="14161C"/>
                 </a:solidFill>
@@ -12683,7 +12628,7 @@
               <a:t>Ba</a:t>
             </a:r>
             <a:r>
-              <a:rPr lang="en-US" sz="6600" dirty="0" spc="-66" kern="0">
+              <a:rPr lang="en-US" sz="6900" dirty="0" spc="-72" kern="0">
                 <a:solidFill>
                   <a:srgbClr val="14161C"/>
                 </a:solidFill>
@@ -12694,7 +12639,7 @@
               <a:t> mức</a:t>
             </a:r>
             <a:r>
-              <a:rPr lang="en-US" sz="6600" dirty="0" spc="-54" kern="0">
+              <a:rPr lang="en-US" sz="6900" dirty="0" spc="-58" kern="0">
                 <a:solidFill>
                   <a:srgbClr val="14161C"/>
                 </a:solidFill>
@@ -12705,7 +12650,7 @@
               <a:t> trưởng</a:t>
             </a:r>
             <a:r>
-              <a:rPr lang="en-US" sz="6600" dirty="0" spc="0" kern="0">
+              <a:rPr lang="en-US" sz="6900" dirty="0" spc="3" kern="0">
                 <a:solidFill>
                   <a:srgbClr val="14161C"/>
                 </a:solidFill>
@@ -12716,7 +12661,7 @@
               <a:t> thành</a:t>
             </a:r>
             <a:r>
-              <a:rPr lang="en-US" sz="6600" dirty="0" spc="-1" kern="0">
+              <a:rPr lang="en-US" sz="6900" dirty="0" spc="-1" kern="0">
                 <a:solidFill>
                   <a:srgbClr val="14161C"/>
                 </a:solidFill>
@@ -12727,7 +12672,7 @@
               <a:t> của</a:t>
             </a:r>
             <a:r>
-              <a:rPr lang="en-US" sz="6600" dirty="0" spc="3" kern="0">
+              <a:rPr lang="en-US" sz="6900" dirty="0" spc="1" kern="0">
                 <a:solidFill>
                   <a:srgbClr val="14161C"/>
                 </a:solidFill>
@@ -12737,7 +12682,7 @@
               </a:rPr>
               <a:t> CNCF</a:t>
             </a:r>
-            <a:endParaRPr lang="en-US" sz="6600" dirty="0"/>
+            <a:endParaRPr lang="en-US" sz="6900" dirty="0"/>
           </a:p>
         </p:txBody>
       </p:sp>

--- a/system-design-101/vi/lessons/sd-13-008/slides/sd-13-008.pptx
+++ b/system-design-101/vi/lessons/sd-13-008/slides/sd-13-008.pptx
@@ -13095,17 +13095,17 @@
           <a:ln/>
         </p:spPr>
         <p:txBody>
-          <a:bodyPr wrap="square" lIns="0" tIns="5334" rIns="0" bIns="-5334" rtlCol="0" anchor="t"/>
+          <a:bodyPr wrap="square" lIns="0" tIns="5667" rIns="0" bIns="-5667" rtlCol="0" anchor="t"/>
           <a:lstStyle/>
           <a:p>
             <a:pPr algn="l" indent="0" marL="0">
               <a:lnSpc>
-                <a:spcPts val="3360"/>
+                <a:spcPts val="3570"/>
               </a:lnSpc>
               <a:buNone/>
             </a:pPr>
             <a:r>
-              <a:rPr lang="en-US" sz="2400" dirty="0" spc="1" kern="0">
+              <a:rPr lang="en-US" sz="2550" dirty="0" spc="-1" kern="0">
                 <a:solidFill>
                   <a:srgbClr val="14161C"/>
                 </a:solidFill>
@@ -13116,7 +13116,7 @@
               <a:t>Kiểm</a:t>
             </a:r>
             <a:r>
-              <a:rPr lang="en-US" sz="2400" dirty="0" spc="0" kern="0">
+              <a:rPr lang="en-US" sz="2550" dirty="0" spc="0" kern="0">
                 <a:solidFill>
                   <a:srgbClr val="14161C"/>
                 </a:solidFill>
@@ -13127,7 +13127,7 @@
               <a:t> phiên</a:t>
             </a:r>
             <a:r>
-              <a:rPr lang="en-US" sz="2400" dirty="0" spc="-1" kern="0">
+              <a:rPr lang="en-US" sz="2550" dirty="0" spc="-3" kern="0">
                 <a:solidFill>
                   <a:srgbClr val="14161C"/>
                 </a:solidFill>
@@ -13138,7 +13138,7 @@
               <a:t> bản</a:t>
             </a:r>
             <a:r>
-              <a:rPr lang="en-US" sz="2400" dirty="0" spc="-18" kern="0">
+              <a:rPr lang="en-US" sz="2550" dirty="0" spc="-19" kern="0">
                 <a:solidFill>
                   <a:srgbClr val="14161C"/>
                 </a:solidFill>
@@ -13149,7 +13149,7 @@
               <a:t> Kubernetes</a:t>
             </a:r>
             <a:r>
-              <a:rPr lang="en-US" sz="2400" dirty="0" spc="7" kern="0">
+              <a:rPr lang="en-US" sz="2550" dirty="0" spc="5" kern="0">
                 <a:solidFill>
                   <a:srgbClr val="14161C"/>
                 </a:solidFill>
@@ -13160,7 +13160,7 @@
               <a:t> được</a:t>
             </a:r>
             <a:r>
-              <a:rPr lang="en-US" sz="2400" dirty="0" spc="1" kern="0">
+              <a:rPr lang="en-US" sz="2550" dirty="0" spc="0" kern="0">
                 <a:solidFill>
                   <a:srgbClr val="14161C"/>
                 </a:solidFill>
@@ -13171,7 +13171,7 @@
               <a:t> hỗ</a:t>
             </a:r>
             <a:r>
-              <a:rPr lang="en-US" sz="2400" dirty="0" spc="-22" kern="0">
+              <a:rPr lang="en-US" sz="2550" dirty="0" spc="-25" kern="0">
                 <a:solidFill>
                   <a:srgbClr val="14161C"/>
                 </a:solidFill>
@@ -13182,7 +13182,7 @@
               <a:t> trợ</a:t>
             </a:r>
             <a:r>
-              <a:rPr lang="en-US" sz="2400" dirty="0" spc="6" kern="0">
+              <a:rPr lang="en-US" sz="2550" dirty="0" spc="6" kern="0">
                 <a:solidFill>
                   <a:srgbClr val="14161C"/>
                 </a:solidFill>
@@ -13193,7 +13193,7 @@
               <a:t> trước</a:t>
             </a:r>
             <a:r>
-              <a:rPr lang="en-US" sz="2400" dirty="0" spc="-2" kern="0">
+              <a:rPr lang="en-US" sz="2550" dirty="0" spc="0" kern="0">
                 <a:solidFill>
                   <a:srgbClr val="14161C"/>
                 </a:solidFill>
@@ -13201,10 +13201,10 @@
                 <a:ea typeface="Be Vietnam Pro" pitchFamily="34" charset="-122"/>
                 <a:cs typeface="Be Vietnam Pro" pitchFamily="34" charset="-120"/>
               </a:rPr>
-              <a:t> khi</a:t>
-            </a:r>
-            <a:r>
-              <a:rPr lang="en-US" sz="2400" dirty="0" spc="3" kern="0">
+              <a:t> khi nâng</a:t>
+            </a:r>
+            <a:r>
+              <a:rPr lang="en-US" sz="2550" dirty="0" spc="1" kern="0">
                 <a:solidFill>
                   <a:srgbClr val="14161C"/>
                 </a:solidFill>
@@ -13212,10 +13212,10 @@
                 <a:ea typeface="Be Vietnam Pro" pitchFamily="34" charset="-122"/>
                 <a:cs typeface="Be Vietnam Pro" pitchFamily="34" charset="-120"/>
               </a:rPr>
-              <a:t> nâng</a:t>
-            </a:r>
-            <a:r>
-              <a:rPr lang="en-US" sz="2400" dirty="0" spc="1" kern="0">
+              <a:t> cấp</a:t>
+            </a:r>
+            <a:r>
+              <a:rPr lang="en-US" sz="2550" dirty="0" spc="0" kern="0">
                 <a:solidFill>
                   <a:srgbClr val="14161C"/>
                 </a:solidFill>
@@ -13223,20 +13223,9 @@
                 <a:ea typeface="Be Vietnam Pro" pitchFamily="34" charset="-122"/>
                 <a:cs typeface="Be Vietnam Pro" pitchFamily="34" charset="-120"/>
               </a:rPr>
-              <a:t> cấp</a:t>
-            </a:r>
-            <a:r>
-              <a:rPr lang="en-US" sz="2400" dirty="0" spc="2" kern="0">
-                <a:solidFill>
-                  <a:srgbClr val="14161C"/>
-                </a:solidFill>
-                <a:latin typeface="Be Vietnam Pro" pitchFamily="34" charset="0"/>
-                <a:ea typeface="Be Vietnam Pro" pitchFamily="34" charset="-122"/>
-                <a:cs typeface="Be Vietnam Pro" pitchFamily="34" charset="-120"/>
-              </a:rPr>
               <a:t> cụm.</a:t>
             </a:r>
-            <a:endParaRPr lang="en-US" sz="2400" dirty="0"/>
+            <a:endParaRPr lang="en-US" sz="2550" dirty="0"/>
           </a:p>
         </p:txBody>
       </p:sp>
@@ -13346,12 +13335,12 @@
           <a:ln/>
         </p:spPr>
         <p:txBody>
-          <a:bodyPr wrap="square" lIns="0" tIns="5334" rIns="0" bIns="-5334" rtlCol="0" anchor="t"/>
+          <a:bodyPr wrap="square" lIns="0" tIns="5667" rIns="0" bIns="-5667" rtlCol="0" anchor="t"/>
           <a:lstStyle/>
           <a:p>
-            <a:pPr algn="l" marL="304800" indent="-217761">
+            <a:pPr algn="l" marL="323850" indent="-231371">
               <a:lnSpc>
-                <a:spcPts val="3360"/>
+                <a:spcPts val="3570"/>
               </a:lnSpc>
               <a:spcAft>
                 <a:spcPts val="600"/>
@@ -13361,7 +13350,7 @@
               <a:buChar char="•"/>
             </a:pPr>
             <a:r>
-              <a:rPr lang="en-US" sz="2400" dirty="0" spc="-1" kern="0">
+              <a:rPr lang="en-US" sz="2550" dirty="0" spc="-1" kern="0">
                 <a:solidFill>
                   <a:srgbClr val="14161C"/>
                 </a:solidFill>
@@ -13372,7 +13361,7 @@
               <a:t>Mỗi</a:t>
             </a:r>
             <a:r>
-              <a:rPr lang="en-US" sz="2400" dirty="0" spc="1" kern="0">
+              <a:rPr lang="en-US" sz="2550" dirty="0" spc="0" kern="0">
                 <a:solidFill>
                   <a:srgbClr val="14161C"/>
                 </a:solidFill>
@@ -13380,10 +13369,10 @@
                 <a:ea typeface="Be Vietnam Pro" pitchFamily="34" charset="-122"/>
                 <a:cs typeface="Be Vietnam Pro" pitchFamily="34" charset="-120"/>
               </a:rPr>
-              <a:t> công cụ thêm:</a:t>
-            </a:r>
-            <a:r>
-              <a:rPr lang="en-US" sz="2400" dirty="0" spc="3" kern="0">
+              <a:t> công</a:t>
+            </a:r>
+            <a:r>
+              <a:rPr lang="en-US" sz="2550" dirty="0" spc="-1" kern="0">
                 <a:solidFill>
                   <a:srgbClr val="14161C"/>
                 </a:solidFill>
@@ -13391,10 +13380,10 @@
                 <a:ea typeface="Be Vietnam Pro" pitchFamily="34" charset="-122"/>
                 <a:cs typeface="Be Vietnam Pro" pitchFamily="34" charset="-120"/>
               </a:rPr>
-              <a:t> nâng</a:t>
-            </a:r>
-            <a:r>
-              <a:rPr lang="en-US" sz="2400" dirty="0" spc="1" kern="0">
+              <a:t> cụ</a:t>
+            </a:r>
+            <a:r>
+              <a:rPr lang="en-US" sz="2550" dirty="0" spc="2" kern="0">
                 <a:solidFill>
                   <a:srgbClr val="14161C"/>
                 </a:solidFill>
@@ -13402,10 +13391,10 @@
                 <a:ea typeface="Be Vietnam Pro" pitchFamily="34" charset="-122"/>
                 <a:cs typeface="Be Vietnam Pro" pitchFamily="34" charset="-120"/>
               </a:rPr>
-              <a:t> cấp,</a:t>
-            </a:r>
-            <a:r>
-              <a:rPr lang="en-US" sz="2400" dirty="0" spc="-15" kern="0">
+              <a:t> thêm:</a:t>
+            </a:r>
+            <a:r>
+              <a:rPr lang="en-US" sz="2550" dirty="0" spc="0" kern="0">
                 <a:solidFill>
                   <a:srgbClr val="14161C"/>
                 </a:solidFill>
@@ -13413,10 +13402,21 @@
                 <a:ea typeface="Be Vietnam Pro" pitchFamily="34" charset="-122"/>
                 <a:cs typeface="Be Vietnam Pro" pitchFamily="34" charset="-120"/>
               </a:rPr>
+              <a:t> nâng cấp,</a:t>
+            </a:r>
+            <a:r>
+              <a:rPr lang="en-US" sz="2550" dirty="0" spc="-19" kern="0">
+                <a:solidFill>
+                  <a:srgbClr val="14161C"/>
+                </a:solidFill>
+                <a:latin typeface="Be Vietnam Pro" pitchFamily="34" charset="0"/>
+                <a:ea typeface="Be Vietnam Pro" pitchFamily="34" charset="-122"/>
+                <a:cs typeface="Be Vietnam Pro" pitchFamily="34" charset="-120"/>
+              </a:rPr>
               <a:t> vá</a:t>
             </a:r>
             <a:r>
-              <a:rPr lang="en-US" sz="2400" dirty="0" spc="0" kern="0">
+              <a:rPr lang="en-US" sz="2550" dirty="0" spc="1" kern="0">
                 <a:solidFill>
                   <a:srgbClr val="14161C"/>
                 </a:solidFill>
@@ -13426,19 +13426,19 @@
               </a:rPr>
               <a:t> lỗi.</a:t>
             </a:r>
-            <a:endParaRPr lang="en-US" sz="2400" dirty="0"/>
+            <a:endParaRPr lang="en-US" sz="2550" dirty="0"/>
           </a:p>
           <a:p>
-            <a:pPr algn="l" marL="304800" indent="-217761">
+            <a:pPr algn="l" marL="323850" indent="-231371">
               <a:lnSpc>
-                <a:spcPts val="3360"/>
+                <a:spcPts val="3570"/>
               </a:lnSpc>
               <a:buSzPct val="100000"/>
               <a:buFont typeface="Arial"/>
               <a:buChar char="•"/>
             </a:pPr>
             <a:r>
-              <a:rPr lang="en-US" sz="2400" dirty="0" spc="-1" kern="0">
+              <a:rPr lang="en-US" sz="2550" dirty="0" spc="1" kern="0">
                 <a:solidFill>
                   <a:srgbClr val="14161C"/>
                 </a:solidFill>
@@ -13446,10 +13446,10 @@
                 <a:ea typeface="Be Vietnam Pro" pitchFamily="34" charset="-122"/>
                 <a:cs typeface="Be Vietnam Pro" pitchFamily="34" charset="-120"/>
               </a:rPr>
-              <a:t>Phải theo</a:t>
-            </a:r>
-            <a:r>
-              <a:rPr lang="en-US" sz="2400" dirty="0" spc="1" kern="0">
+              <a:t>Phải</a:t>
+            </a:r>
+            <a:r>
+              <a:rPr lang="en-US" sz="2550" dirty="0" spc="-2" kern="0">
                 <a:solidFill>
                   <a:srgbClr val="14161C"/>
                 </a:solidFill>
@@ -13457,10 +13457,21 @@
                 <a:ea typeface="Be Vietnam Pro" pitchFamily="34" charset="-122"/>
                 <a:cs typeface="Be Vietnam Pro" pitchFamily="34" charset="-120"/>
               </a:rPr>
+              <a:t> theo</a:t>
+            </a:r>
+            <a:r>
+              <a:rPr lang="en-US" sz="2550" dirty="0" spc="0" kern="0">
+                <a:solidFill>
+                  <a:srgbClr val="14161C"/>
+                </a:solidFill>
+                <a:latin typeface="Be Vietnam Pro" pitchFamily="34" charset="0"/>
+                <a:ea typeface="Be Vietnam Pro" pitchFamily="34" charset="-122"/>
+                <a:cs typeface="Be Vietnam Pro" pitchFamily="34" charset="-120"/>
+              </a:rPr>
               <a:t> dõi</a:t>
             </a:r>
             <a:r>
-              <a:rPr lang="en-US" sz="2400" dirty="0" spc="-16" kern="0">
+              <a:rPr lang="en-US" sz="2550" dirty="0" spc="-19" kern="0">
                 <a:solidFill>
                   <a:srgbClr val="14161C"/>
                 </a:solidFill>
@@ -13471,7 +13482,7 @@
               <a:t> và</a:t>
             </a:r>
             <a:r>
-              <a:rPr lang="en-US" sz="2400" dirty="0" spc="-7" kern="0">
+              <a:rPr lang="en-US" sz="2550" dirty="0" spc="-9" kern="0">
                 <a:solidFill>
                   <a:srgbClr val="14161C"/>
                 </a:solidFill>
@@ -13482,7 +13493,7 @@
               <a:t> dạy</a:t>
             </a:r>
             <a:r>
-              <a:rPr lang="en-US" sz="2400" dirty="0" spc="6" kern="0">
+              <a:rPr lang="en-US" sz="2550" dirty="0" spc="5" kern="0">
                 <a:solidFill>
                   <a:srgbClr val="14161C"/>
                 </a:solidFill>
@@ -13493,7 +13504,7 @@
               <a:t> người</a:t>
             </a:r>
             <a:r>
-              <a:rPr lang="en-US" sz="2400" dirty="0" spc="1" kern="0">
+              <a:rPr lang="en-US" sz="2550" dirty="0" spc="1" kern="0">
                 <a:solidFill>
                   <a:srgbClr val="14161C"/>
                 </a:solidFill>
@@ -13503,7 +13514,7 @@
               </a:rPr>
               <a:t> mới.</a:t>
             </a:r>
-            <a:endParaRPr lang="en-US" sz="2400" dirty="0"/>
+            <a:endParaRPr lang="en-US" sz="2550" dirty="0"/>
           </a:p>
         </p:txBody>
       </p:sp>

--- a/system-design-101/vi/lessons/sd-13-008/slides/sd-13-008.pptx
+++ b/system-design-101/vi/lessons/sd-13-008/slides/sd-13-008.pptx
@@ -4571,10 +4571,10 @@
                 <a:ea typeface="Be Vietnam Pro" pitchFamily="34" charset="-122"/>
                 <a:cs typeface="Be Vietnam Pro" pitchFamily="34" charset="-120"/>
               </a:rPr>
-              <a:t> chỉ là minh</a:t>
-            </a:r>
-            <a:r>
-              <a:rPr lang="en-US" sz="3000" dirty="0" spc="-3" kern="0">
+              <a:t> chỉ minh</a:t>
+            </a:r>
+            <a:r>
+              <a:rPr lang="en-US" sz="3000" dirty="0" spc="-2" kern="0">
                 <a:solidFill>
                   <a:srgbClr val="6B6A66"/>
                 </a:solidFill>
@@ -10884,7 +10884,7 @@
               <a:t> hơn</a:t>
             </a:r>
             <a:r>
-              <a:rPr lang="en-US" sz="3000" b="1" dirty="0" spc="0" kern="0">
+              <a:rPr lang="en-US" sz="3000" b="1" dirty="0" spc="1" kern="0">
                 <a:solidFill>
                   <a:srgbClr val="F3EEE3"/>
                 </a:solidFill>
@@ -10892,29 +10892,7 @@
                 <a:ea typeface="Be Vietnam Pro" pitchFamily="34" charset="-122"/>
                 <a:cs typeface="Be Vietnam Pro" pitchFamily="34" charset="-120"/>
               </a:rPr>
-              <a:t> nhiều</a:t>
-            </a:r>
-            <a:r>
-              <a:rPr lang="en-US" sz="3000" b="1" dirty="0" spc="-11" kern="0">
-                <a:solidFill>
-                  <a:srgbClr val="F3EEE3"/>
-                </a:solidFill>
-                <a:latin typeface="Be Vietnam Pro" pitchFamily="34" charset="0"/>
-                <a:ea typeface="Be Vietnam Pro" pitchFamily="34" charset="-122"/>
-                <a:cs typeface="Be Vietnam Pro" pitchFamily="34" charset="-120"/>
-              </a:rPr>
-              <a:t> công</a:t>
-            </a:r>
-            <a:r>
-              <a:rPr lang="en-US" sz="3000" b="1" dirty="0" spc="2" kern="0">
-                <a:solidFill>
-                  <a:srgbClr val="F3EEE3"/>
-                </a:solidFill>
-                <a:latin typeface="Be Vietnam Pro" pitchFamily="34" charset="0"/>
-                <a:ea typeface="Be Vietnam Pro" pitchFamily="34" charset="-122"/>
-                <a:cs typeface="Be Vietnam Pro" pitchFamily="34" charset="-120"/>
-              </a:rPr>
-              <a:t> cụ.</a:t>
+              <a:t> nhiều.</a:t>
             </a:r>
             <a:endParaRPr lang="en-US" sz="3000" dirty="0"/>
           </a:p>
@@ -13105,6 +13083,83 @@
               <a:buNone/>
             </a:pPr>
             <a:r>
+              <a:rPr lang="en-US" sz="2550" dirty="0" spc="2" kern="0">
+                <a:solidFill>
+                  <a:srgbClr val="14161C"/>
+                </a:solidFill>
+                <a:latin typeface="Be Vietnam Pro" pitchFamily="34" charset="0"/>
+                <a:ea typeface="Be Vietnam Pro" pitchFamily="34" charset="-122"/>
+                <a:cs typeface="Be Vietnam Pro" pitchFamily="34" charset="-120"/>
+              </a:rPr>
+              <a:t>Nâng</a:t>
+            </a:r>
+            <a:r>
+              <a:rPr lang="en-US" sz="2550" dirty="0" spc="0" kern="0">
+                <a:solidFill>
+                  <a:srgbClr val="14161C"/>
+                </a:solidFill>
+                <a:latin typeface="Be Vietnam Pro" pitchFamily="34" charset="0"/>
+                <a:ea typeface="Be Vietnam Pro" pitchFamily="34" charset="-122"/>
+                <a:cs typeface="Be Vietnam Pro" pitchFamily="34" charset="-120"/>
+              </a:rPr>
+              <a:t> cấp</a:t>
+            </a:r>
+            <a:r>
+              <a:rPr lang="en-US" sz="2550" dirty="0" spc="1" kern="0">
+                <a:solidFill>
+                  <a:srgbClr val="14161C"/>
+                </a:solidFill>
+                <a:latin typeface="Be Vietnam Pro" pitchFamily="34" charset="0"/>
+                <a:ea typeface="Be Vietnam Pro" pitchFamily="34" charset="-122"/>
+                <a:cs typeface="Be Vietnam Pro" pitchFamily="34" charset="-120"/>
+              </a:rPr>
+              <a:t> cụm: kiểm</a:t>
+            </a:r>
+            <a:r>
+              <a:rPr lang="en-US" sz="2550" dirty="0" spc="5" kern="0">
+                <a:solidFill>
+                  <a:srgbClr val="14161C"/>
+                </a:solidFill>
+                <a:latin typeface="Be Vietnam Pro" pitchFamily="34" charset="0"/>
+                <a:ea typeface="Be Vietnam Pro" pitchFamily="34" charset="-122"/>
+                <a:cs typeface="Be Vietnam Pro" pitchFamily="34" charset="-120"/>
+              </a:rPr>
+              <a:t> trước</a:t>
+            </a:r>
+            <a:r>
+              <a:rPr lang="en-US" sz="2550" dirty="0" spc="0" kern="0">
+                <a:solidFill>
+                  <a:srgbClr val="14161C"/>
+                </a:solidFill>
+                <a:latin typeface="Be Vietnam Pro" pitchFamily="34" charset="0"/>
+                <a:ea typeface="Be Vietnam Pro" pitchFamily="34" charset="-122"/>
+                <a:cs typeface="Be Vietnam Pro" pitchFamily="34" charset="-120"/>
+              </a:rPr>
+              <a:t> phiên</a:t>
+            </a:r>
+            <a:r>
+              <a:rPr lang="en-US" sz="2550" dirty="0" spc="-3" kern="0">
+                <a:solidFill>
+                  <a:srgbClr val="14161C"/>
+                </a:solidFill>
+                <a:latin typeface="Be Vietnam Pro" pitchFamily="34" charset="0"/>
+                <a:ea typeface="Be Vietnam Pro" pitchFamily="34" charset="-122"/>
+                <a:cs typeface="Be Vietnam Pro" pitchFamily="34" charset="-120"/>
+              </a:rPr>
+              <a:t> bản</a:t>
+            </a:r>
+            <a:r>
+              <a:rPr lang="en-US" sz="2550" dirty="0" spc="7" kern="0">
+                <a:solidFill>
+                  <a:srgbClr val="14161C"/>
+                </a:solidFill>
+                <a:latin typeface="Be Vietnam Pro" pitchFamily="34" charset="0"/>
+                <a:ea typeface="Be Vietnam Pro" pitchFamily="34" charset="-122"/>
+                <a:cs typeface="Be Vietnam Pro" pitchFamily="34" charset="-120"/>
+              </a:rPr>
+              <a:t> được</a:t>
+            </a:r>
+            <a:r>
               <a:rPr lang="en-US" sz="2550" dirty="0" spc="-1" kern="0">
                 <a:solidFill>
                   <a:srgbClr val="14161C"/>
@@ -13113,10 +13168,10 @@
                 <a:ea typeface="Be Vietnam Pro" pitchFamily="34" charset="-122"/>
                 <a:cs typeface="Be Vietnam Pro" pitchFamily="34" charset="-120"/>
               </a:rPr>
-              <a:t>Kiểm</a:t>
-            </a:r>
-            <a:r>
-              <a:rPr lang="en-US" sz="2550" dirty="0" spc="0" kern="0">
+              <a:t> hỗ</a:t>
+            </a:r>
+            <a:r>
+              <a:rPr lang="en-US" sz="2550" dirty="0" spc="-19" kern="0">
                 <a:solidFill>
                   <a:srgbClr val="14161C"/>
                 </a:solidFill>
@@ -13124,106 +13179,7 @@
                 <a:ea typeface="Be Vietnam Pro" pitchFamily="34" charset="-122"/>
                 <a:cs typeface="Be Vietnam Pro" pitchFamily="34" charset="-120"/>
               </a:rPr>
-              <a:t> phiên</a:t>
-            </a:r>
-            <a:r>
-              <a:rPr lang="en-US" sz="2550" dirty="0" spc="-3" kern="0">
-                <a:solidFill>
-                  <a:srgbClr val="14161C"/>
-                </a:solidFill>
-                <a:latin typeface="Be Vietnam Pro" pitchFamily="34" charset="0"/>
-                <a:ea typeface="Be Vietnam Pro" pitchFamily="34" charset="-122"/>
-                <a:cs typeface="Be Vietnam Pro" pitchFamily="34" charset="-120"/>
-              </a:rPr>
-              <a:t> bản</a:t>
-            </a:r>
-            <a:r>
-              <a:rPr lang="en-US" sz="2550" dirty="0" spc="-19" kern="0">
-                <a:solidFill>
-                  <a:srgbClr val="14161C"/>
-                </a:solidFill>
-                <a:latin typeface="Be Vietnam Pro" pitchFamily="34" charset="0"/>
-                <a:ea typeface="Be Vietnam Pro" pitchFamily="34" charset="-122"/>
-                <a:cs typeface="Be Vietnam Pro" pitchFamily="34" charset="-120"/>
-              </a:rPr>
-              <a:t> Kubernetes</a:t>
-            </a:r>
-            <a:r>
-              <a:rPr lang="en-US" sz="2550" dirty="0" spc="5" kern="0">
-                <a:solidFill>
-                  <a:srgbClr val="14161C"/>
-                </a:solidFill>
-                <a:latin typeface="Be Vietnam Pro" pitchFamily="34" charset="0"/>
-                <a:ea typeface="Be Vietnam Pro" pitchFamily="34" charset="-122"/>
-                <a:cs typeface="Be Vietnam Pro" pitchFamily="34" charset="-120"/>
-              </a:rPr>
-              <a:t> được</a:t>
-            </a:r>
-            <a:r>
-              <a:rPr lang="en-US" sz="2550" dirty="0" spc="0" kern="0">
-                <a:solidFill>
-                  <a:srgbClr val="14161C"/>
-                </a:solidFill>
-                <a:latin typeface="Be Vietnam Pro" pitchFamily="34" charset="0"/>
-                <a:ea typeface="Be Vietnam Pro" pitchFamily="34" charset="-122"/>
-                <a:cs typeface="Be Vietnam Pro" pitchFamily="34" charset="-120"/>
-              </a:rPr>
-              <a:t> hỗ</a:t>
-            </a:r>
-            <a:r>
-              <a:rPr lang="en-US" sz="2550" dirty="0" spc="-25" kern="0">
-                <a:solidFill>
-                  <a:srgbClr val="14161C"/>
-                </a:solidFill>
-                <a:latin typeface="Be Vietnam Pro" pitchFamily="34" charset="0"/>
-                <a:ea typeface="Be Vietnam Pro" pitchFamily="34" charset="-122"/>
-                <a:cs typeface="Be Vietnam Pro" pitchFamily="34" charset="-120"/>
-              </a:rPr>
-              <a:t> trợ</a:t>
-            </a:r>
-            <a:r>
-              <a:rPr lang="en-US" sz="2550" dirty="0" spc="6" kern="0">
-                <a:solidFill>
-                  <a:srgbClr val="14161C"/>
-                </a:solidFill>
-                <a:latin typeface="Be Vietnam Pro" pitchFamily="34" charset="0"/>
-                <a:ea typeface="Be Vietnam Pro" pitchFamily="34" charset="-122"/>
-                <a:cs typeface="Be Vietnam Pro" pitchFamily="34" charset="-120"/>
-              </a:rPr>
-              <a:t> trước</a:t>
-            </a:r>
-            <a:r>
-              <a:rPr lang="en-US" sz="2550" dirty="0" spc="0" kern="0">
-                <a:solidFill>
-                  <a:srgbClr val="14161C"/>
-                </a:solidFill>
-                <a:latin typeface="Be Vietnam Pro" pitchFamily="34" charset="0"/>
-                <a:ea typeface="Be Vietnam Pro" pitchFamily="34" charset="-122"/>
-                <a:cs typeface="Be Vietnam Pro" pitchFamily="34" charset="-120"/>
-              </a:rPr>
-              <a:t> khi nâng</a:t>
-            </a:r>
-            <a:r>
-              <a:rPr lang="en-US" sz="2550" dirty="0" spc="1" kern="0">
-                <a:solidFill>
-                  <a:srgbClr val="14161C"/>
-                </a:solidFill>
-                <a:latin typeface="Be Vietnam Pro" pitchFamily="34" charset="0"/>
-                <a:ea typeface="Be Vietnam Pro" pitchFamily="34" charset="-122"/>
-                <a:cs typeface="Be Vietnam Pro" pitchFamily="34" charset="-120"/>
-              </a:rPr>
-              <a:t> cấp</a:t>
-            </a:r>
-            <a:r>
-              <a:rPr lang="en-US" sz="2550" dirty="0" spc="0" kern="0">
-                <a:solidFill>
-                  <a:srgbClr val="14161C"/>
-                </a:solidFill>
-                <a:latin typeface="Be Vietnam Pro" pitchFamily="34" charset="0"/>
-                <a:ea typeface="Be Vietnam Pro" pitchFamily="34" charset="-122"/>
-                <a:cs typeface="Be Vietnam Pro" pitchFamily="34" charset="-120"/>
-              </a:rPr>
-              <a:t> cụm.</a:t>
+              <a:t> trợ.</a:t>
             </a:r>
             <a:endParaRPr lang="en-US" sz="2550" dirty="0"/>
           </a:p>
